--- a/Vizsgaremek - Mediahub.pptx
+++ b/Vizsgaremek - Mediahub.pptx
@@ -4642,8 +4642,19 @@
                 <a:latin typeface="Times New Roman" panose="02020603050405020304" pitchFamily="18" charset="0"/>
                 <a:cs typeface="Times New Roman" panose="02020603050405020304" pitchFamily="18" charset="0"/>
               </a:rPr>
-              <a:t>Várjuk a kérdéseket!</a:t>
-            </a:r>
+              <a:t>Várjuk </a:t>
+            </a:r>
+            <a:r>
+              <a:rPr lang="hu-HU">
+                <a:latin typeface="Times New Roman" panose="02020603050405020304" pitchFamily="18" charset="0"/>
+                <a:cs typeface="Times New Roman" panose="02020603050405020304" pitchFamily="18" charset="0"/>
+              </a:rPr>
+              <a:t>a kérdéseket</a:t>
+            </a:r>
+            <a:endParaRPr lang="hu-HU" dirty="0">
+              <a:latin typeface="Times New Roman" panose="02020603050405020304" pitchFamily="18" charset="0"/>
+              <a:cs typeface="Times New Roman" panose="02020603050405020304" pitchFamily="18" charset="0"/>
+            </a:endParaRPr>
           </a:p>
         </p:txBody>
       </p:sp>

--- a/Vizsgaremek - Mediahub.pptx
+++ b/Vizsgaremek - Mediahub.pptx
@@ -125,6 +125,763 @@
 </p:presentation>
 </file>
 
+<file path=ppt/revisionInfo.xml><?xml version="1.0" encoding="utf-8"?>
+<p1510:revInfo xmlns:a="http://schemas.openxmlformats.org/drawingml/2006/main" xmlns:r="http://schemas.openxmlformats.org/officeDocument/2006/relationships" xmlns:p1510="http://schemas.microsoft.com/office/powerpoint/2015/10/main">
+  <p1510:revLst>
+    <p1510:client id="{2906A5C4-4AE4-4E11-926F-CBEF624CA5A3}" v="461" dt="2026-04-16T22:42:01.460"/>
+    <p1510:client id="{AA720138-E68B-40D6-B653-E279C41F116A}" v="13" dt="2026-04-16T22:02:27.183"/>
+  </p1510:revLst>
+</p1510:revInfo>
+</file>
+
+<file path=ppt/changesInfos/changesInfo1.xml><?xml version="1.0" encoding="utf-8"?>
+<pc:chgInfo xmlns:a="http://schemas.openxmlformats.org/drawingml/2006/main" xmlns:r="http://schemas.openxmlformats.org/officeDocument/2006/relationships" xmlns:ac="http://schemas.microsoft.com/office/drawing/2013/main/command" xmlns:pc="http://schemas.microsoft.com/office/powerpoint/2013/main/command">
+  <pc:docChgLst>
+    <pc:chgData name="Lóránt Márton" userId="S::lorant.marton_2021d@bolyai-szakkozep.hu::b174f32f-8274-4b2f-9d36-85f542f97edc" providerId="AD" clId="Web-{2906A5C4-4AE4-4E11-926F-CBEF624CA5A3}"/>
+    <pc:docChg chg="modSld">
+      <pc:chgData name="Lóránt Márton" userId="S::lorant.marton_2021d@bolyai-szakkozep.hu::b174f32f-8274-4b2f-9d36-85f542f97edc" providerId="AD" clId="Web-{2906A5C4-4AE4-4E11-926F-CBEF624CA5A3}" dt="2026-04-16T22:42:01.460" v="481" actId="20577"/>
+      <pc:docMkLst>
+        <pc:docMk/>
+      </pc:docMkLst>
+      <pc:sldChg chg="modSp">
+        <pc:chgData name="Lóránt Márton" userId="S::lorant.marton_2021d@bolyai-szakkozep.hu::b174f32f-8274-4b2f-9d36-85f542f97edc" providerId="AD" clId="Web-{2906A5C4-4AE4-4E11-926F-CBEF624CA5A3}" dt="2026-04-16T22:32:08.865" v="355" actId="20577"/>
+        <pc:sldMkLst>
+          <pc:docMk/>
+          <pc:sldMk cId="3166409314" sldId="256"/>
+        </pc:sldMkLst>
+        <pc:spChg chg="mod">
+          <ac:chgData name="Lóránt Márton" userId="S::lorant.marton_2021d@bolyai-szakkozep.hu::b174f32f-8274-4b2f-9d36-85f542f97edc" providerId="AD" clId="Web-{2906A5C4-4AE4-4E11-926F-CBEF624CA5A3}" dt="2026-04-16T22:32:08.865" v="355" actId="20577"/>
+          <ac:spMkLst>
+            <pc:docMk/>
+            <pc:sldMk cId="3166409314" sldId="256"/>
+            <ac:spMk id="3" creationId="{2BC4E2D0-1598-4790-BC4A-3C9AFFCB142F}"/>
+          </ac:spMkLst>
+        </pc:spChg>
+      </pc:sldChg>
+      <pc:sldChg chg="addSp modSp mod modClrScheme chgLayout">
+        <pc:chgData name="Lóránt Márton" userId="S::lorant.marton_2021d@bolyai-szakkozep.hu::b174f32f-8274-4b2f-9d36-85f542f97edc" providerId="AD" clId="Web-{2906A5C4-4AE4-4E11-926F-CBEF624CA5A3}" dt="2026-04-16T22:40:56.068" v="472" actId="20577"/>
+        <pc:sldMkLst>
+          <pc:docMk/>
+          <pc:sldMk cId="3844637634" sldId="257"/>
+        </pc:sldMkLst>
+        <pc:spChg chg="mod ord">
+          <ac:chgData name="Lóránt Márton" userId="S::lorant.marton_2021d@bolyai-szakkozep.hu::b174f32f-8274-4b2f-9d36-85f542f97edc" providerId="AD" clId="Web-{2906A5C4-4AE4-4E11-926F-CBEF624CA5A3}" dt="2026-04-16T22:35:22.694" v="368"/>
+          <ac:spMkLst>
+            <pc:docMk/>
+            <pc:sldMk cId="3844637634" sldId="257"/>
+            <ac:spMk id="2" creationId="{8D0C5D4E-4A08-4C89-B934-0742DA31B71B}"/>
+          </ac:spMkLst>
+        </pc:spChg>
+        <pc:spChg chg="mod ord">
+          <ac:chgData name="Lóránt Márton" userId="S::lorant.marton_2021d@bolyai-szakkozep.hu::b174f32f-8274-4b2f-9d36-85f542f97edc" providerId="AD" clId="Web-{2906A5C4-4AE4-4E11-926F-CBEF624CA5A3}" dt="2026-04-16T22:40:56.068" v="472" actId="20577"/>
+          <ac:spMkLst>
+            <pc:docMk/>
+            <pc:sldMk cId="3844637634" sldId="257"/>
+            <ac:spMk id="3" creationId="{9C53C302-C1B7-4ACF-A34E-F3C55D242529}"/>
+          </ac:spMkLst>
+        </pc:spChg>
+        <pc:spChg chg="add mod ord">
+          <ac:chgData name="Lóránt Márton" userId="S::lorant.marton_2021d@bolyai-szakkozep.hu::b174f32f-8274-4b2f-9d36-85f542f97edc" providerId="AD" clId="Web-{2906A5C4-4AE4-4E11-926F-CBEF624CA5A3}" dt="2026-04-16T22:40:43.864" v="470" actId="20577"/>
+          <ac:spMkLst>
+            <pc:docMk/>
+            <pc:sldMk cId="3844637634" sldId="257"/>
+            <ac:spMk id="4" creationId="{9C78F864-F66C-098D-FEE8-C68AF30F1AD5}"/>
+          </ac:spMkLst>
+        </pc:spChg>
+        <pc:spChg chg="mod ord">
+          <ac:chgData name="Lóránt Márton" userId="S::lorant.marton_2021d@bolyai-szakkozep.hu::b174f32f-8274-4b2f-9d36-85f542f97edc" providerId="AD" clId="Web-{2906A5C4-4AE4-4E11-926F-CBEF624CA5A3}" dt="2026-04-16T22:35:22.694" v="368"/>
+          <ac:spMkLst>
+            <pc:docMk/>
+            <pc:sldMk cId="3844637634" sldId="257"/>
+            <ac:spMk id="6" creationId="{C466189B-5324-434F-9225-ED8B24C438C5}"/>
+          </ac:spMkLst>
+        </pc:spChg>
+      </pc:sldChg>
+      <pc:sldChg chg="addSp delSp modSp mod setBg">
+        <pc:chgData name="Lóránt Márton" userId="S::lorant.marton_2021d@bolyai-szakkozep.hu::b174f32f-8274-4b2f-9d36-85f542f97edc" providerId="AD" clId="Web-{2906A5C4-4AE4-4E11-926F-CBEF624CA5A3}" dt="2026-04-16T22:33:30.389" v="361" actId="20577"/>
+        <pc:sldMkLst>
+          <pc:docMk/>
+          <pc:sldMk cId="1589087573" sldId="258"/>
+        </pc:sldMkLst>
+        <pc:spChg chg="mod">
+          <ac:chgData name="Lóránt Márton" userId="S::lorant.marton_2021d@bolyai-szakkozep.hu::b174f32f-8274-4b2f-9d36-85f542f97edc" providerId="AD" clId="Web-{2906A5C4-4AE4-4E11-926F-CBEF624CA5A3}" dt="2026-04-16T22:33:23.654" v="360"/>
+          <ac:spMkLst>
+            <pc:docMk/>
+            <pc:sldMk cId="1589087573" sldId="258"/>
+            <ac:spMk id="2" creationId="{B76A1B18-3F02-4F37-B706-66753742464B}"/>
+          </ac:spMkLst>
+        </pc:spChg>
+        <pc:spChg chg="mod">
+          <ac:chgData name="Lóránt Márton" userId="S::lorant.marton_2021d@bolyai-szakkozep.hu::b174f32f-8274-4b2f-9d36-85f542f97edc" providerId="AD" clId="Web-{2906A5C4-4AE4-4E11-926F-CBEF624CA5A3}" dt="2026-04-16T22:33:30.389" v="361" actId="20577"/>
+          <ac:spMkLst>
+            <pc:docMk/>
+            <pc:sldMk cId="1589087573" sldId="258"/>
+            <ac:spMk id="3" creationId="{4979FD1C-F380-4CCC-AB29-A23481993BC8}"/>
+          </ac:spMkLst>
+        </pc:spChg>
+        <pc:spChg chg="mod">
+          <ac:chgData name="Lóránt Márton" userId="S::lorant.marton_2021d@bolyai-szakkozep.hu::b174f32f-8274-4b2f-9d36-85f542f97edc" providerId="AD" clId="Web-{2906A5C4-4AE4-4E11-926F-CBEF624CA5A3}" dt="2026-04-16T22:33:23.654" v="360"/>
+          <ac:spMkLst>
+            <pc:docMk/>
+            <pc:sldMk cId="1589087573" sldId="258"/>
+            <ac:spMk id="6" creationId="{0C7B35AC-401D-4E50-822F-C7C0D445AA28}"/>
+          </ac:spMkLst>
+        </pc:spChg>
+        <pc:spChg chg="add del">
+          <ac:chgData name="Lóránt Márton" userId="S::lorant.marton_2021d@bolyai-szakkozep.hu::b174f32f-8274-4b2f-9d36-85f542f97edc" providerId="AD" clId="Web-{2906A5C4-4AE4-4E11-926F-CBEF624CA5A3}" dt="2026-04-16T22:33:23.654" v="359"/>
+          <ac:spMkLst>
+            <pc:docMk/>
+            <pc:sldMk cId="1589087573" sldId="258"/>
+            <ac:spMk id="11" creationId="{E5958DBC-F4DA-42A8-8C52-860179790ECD}"/>
+          </ac:spMkLst>
+        </pc:spChg>
+        <pc:spChg chg="add del">
+          <ac:chgData name="Lóránt Márton" userId="S::lorant.marton_2021d@bolyai-szakkozep.hu::b174f32f-8274-4b2f-9d36-85f542f97edc" providerId="AD" clId="Web-{2906A5C4-4AE4-4E11-926F-CBEF624CA5A3}" dt="2026-04-16T22:33:23.654" v="359"/>
+          <ac:spMkLst>
+            <pc:docMk/>
+            <pc:sldMk cId="1589087573" sldId="258"/>
+            <ac:spMk id="15" creationId="{51DDD252-D7C8-4CE5-9C61-D60D722BC217}"/>
+          </ac:spMkLst>
+        </pc:spChg>
+        <pc:spChg chg="add del">
+          <ac:chgData name="Lóránt Márton" userId="S::lorant.marton_2021d@bolyai-szakkozep.hu::b174f32f-8274-4b2f-9d36-85f542f97edc" providerId="AD" clId="Web-{2906A5C4-4AE4-4E11-926F-CBEF624CA5A3}" dt="2026-04-16T22:33:23.654" v="359"/>
+          <ac:spMkLst>
+            <pc:docMk/>
+            <pc:sldMk cId="1589087573" sldId="258"/>
+            <ac:spMk id="17" creationId="{2FBD75F5-C49C-4F6A-8D43-7A5939C23307}"/>
+          </ac:spMkLst>
+        </pc:spChg>
+        <pc:picChg chg="add mod ord">
+          <ac:chgData name="Lóránt Márton" userId="S::lorant.marton_2021d@bolyai-szakkozep.hu::b174f32f-8274-4b2f-9d36-85f542f97edc" providerId="AD" clId="Web-{2906A5C4-4AE4-4E11-926F-CBEF624CA5A3}" dt="2026-04-16T22:33:23.654" v="360"/>
+          <ac:picMkLst>
+            <pc:docMk/>
+            <pc:sldMk cId="1589087573" sldId="258"/>
+            <ac:picMk id="4" creationId="{1ED3EBE8-C6FC-E4AF-F3DE-A63831DFE861}"/>
+          </ac:picMkLst>
+        </pc:picChg>
+        <pc:picChg chg="add mod ord">
+          <ac:chgData name="Lóránt Márton" userId="S::lorant.marton_2021d@bolyai-szakkozep.hu::b174f32f-8274-4b2f-9d36-85f542f97edc" providerId="AD" clId="Web-{2906A5C4-4AE4-4E11-926F-CBEF624CA5A3}" dt="2026-04-16T22:33:23.654" v="360"/>
+          <ac:picMkLst>
+            <pc:docMk/>
+            <pc:sldMk cId="1589087573" sldId="258"/>
+            <ac:picMk id="5" creationId="{DD1B3D79-BD53-65CB-E83B-6498BE330435}"/>
+          </ac:picMkLst>
+        </pc:picChg>
+        <pc:cxnChg chg="add del">
+          <ac:chgData name="Lóránt Márton" userId="S::lorant.marton_2021d@bolyai-szakkozep.hu::b174f32f-8274-4b2f-9d36-85f542f97edc" providerId="AD" clId="Web-{2906A5C4-4AE4-4E11-926F-CBEF624CA5A3}" dt="2026-04-16T22:33:23.654" v="359"/>
+          <ac:cxnSpMkLst>
+            <pc:docMk/>
+            <pc:sldMk cId="1589087573" sldId="258"/>
+            <ac:cxnSpMk id="13" creationId="{79FCC9A9-2031-4283-9B27-34B62BB7F305}"/>
+          </ac:cxnSpMkLst>
+        </pc:cxnChg>
+      </pc:sldChg>
+      <pc:sldChg chg="addSp delSp modSp">
+        <pc:chgData name="Lóránt Márton" userId="S::lorant.marton_2021d@bolyai-szakkozep.hu::b174f32f-8274-4b2f-9d36-85f542f97edc" providerId="AD" clId="Web-{2906A5C4-4AE4-4E11-926F-CBEF624CA5A3}" dt="2026-04-16T22:29:53.093" v="329" actId="14100"/>
+        <pc:sldMkLst>
+          <pc:docMk/>
+          <pc:sldMk cId="1242175080" sldId="259"/>
+        </pc:sldMkLst>
+        <pc:spChg chg="mod">
+          <ac:chgData name="Lóránt Márton" userId="S::lorant.marton_2021d@bolyai-szakkozep.hu::b174f32f-8274-4b2f-9d36-85f542f97edc" providerId="AD" clId="Web-{2906A5C4-4AE4-4E11-926F-CBEF624CA5A3}" dt="2026-04-16T22:29:17.640" v="320" actId="1076"/>
+          <ac:spMkLst>
+            <pc:docMk/>
+            <pc:sldMk cId="1242175080" sldId="259"/>
+            <ac:spMk id="2" creationId="{2A0062F5-E465-40DB-86CC-F0A4991EABE9}"/>
+          </ac:spMkLst>
+        </pc:spChg>
+        <pc:spChg chg="del">
+          <ac:chgData name="Lóránt Márton" userId="S::lorant.marton_2021d@bolyai-szakkozep.hu::b174f32f-8274-4b2f-9d36-85f542f97edc" providerId="AD" clId="Web-{2906A5C4-4AE4-4E11-926F-CBEF624CA5A3}" dt="2026-04-16T22:28:39.655" v="313"/>
+          <ac:spMkLst>
+            <pc:docMk/>
+            <pc:sldMk cId="1242175080" sldId="259"/>
+            <ac:spMk id="8" creationId="{3F0260B1-7327-78F3-B361-294021CCFD33}"/>
+          </ac:spMkLst>
+        </pc:spChg>
+        <pc:picChg chg="add mod ord">
+          <ac:chgData name="Lóránt Márton" userId="S::lorant.marton_2021d@bolyai-szakkozep.hu::b174f32f-8274-4b2f-9d36-85f542f97edc" providerId="AD" clId="Web-{2906A5C4-4AE4-4E11-926F-CBEF624CA5A3}" dt="2026-04-16T22:29:53.093" v="329" actId="14100"/>
+          <ac:picMkLst>
+            <pc:docMk/>
+            <pc:sldMk cId="1242175080" sldId="259"/>
+            <ac:picMk id="3" creationId="{35667589-7A36-6F4D-BC00-5AEF8C2563CF}"/>
+          </ac:picMkLst>
+        </pc:picChg>
+        <pc:picChg chg="add mod">
+          <ac:chgData name="Lóránt Márton" userId="S::lorant.marton_2021d@bolyai-szakkozep.hu::b174f32f-8274-4b2f-9d36-85f542f97edc" providerId="AD" clId="Web-{2906A5C4-4AE4-4E11-926F-CBEF624CA5A3}" dt="2026-04-16T22:29:34.140" v="324" actId="14100"/>
+          <ac:picMkLst>
+            <pc:docMk/>
+            <pc:sldMk cId="1242175080" sldId="259"/>
+            <ac:picMk id="4" creationId="{2C2C50BA-5FC1-5EC6-FBD4-FFB14F81F2BB}"/>
+          </ac:picMkLst>
+        </pc:picChg>
+      </pc:sldChg>
+      <pc:sldChg chg="addSp delSp modSp mod setBg">
+        <pc:chgData name="Lóránt Márton" userId="S::lorant.marton_2021d@bolyai-szakkozep.hu::b174f32f-8274-4b2f-9d36-85f542f97edc" providerId="AD" clId="Web-{2906A5C4-4AE4-4E11-926F-CBEF624CA5A3}" dt="2026-04-16T22:31:23.567" v="343" actId="20577"/>
+        <pc:sldMkLst>
+          <pc:docMk/>
+          <pc:sldMk cId="1771695146" sldId="260"/>
+        </pc:sldMkLst>
+        <pc:spChg chg="mod">
+          <ac:chgData name="Lóránt Márton" userId="S::lorant.marton_2021d@bolyai-szakkozep.hu::b174f32f-8274-4b2f-9d36-85f542f97edc" providerId="AD" clId="Web-{2906A5C4-4AE4-4E11-926F-CBEF624CA5A3}" dt="2026-04-16T22:25:52.449" v="312"/>
+          <ac:spMkLst>
+            <pc:docMk/>
+            <pc:sldMk cId="1771695146" sldId="260"/>
+            <ac:spMk id="2" creationId="{52FC3ACD-20C4-4A6B-8309-708F9C7979DD}"/>
+          </ac:spMkLst>
+        </pc:spChg>
+        <pc:spChg chg="mod ord">
+          <ac:chgData name="Lóránt Márton" userId="S::lorant.marton_2021d@bolyai-szakkozep.hu::b174f32f-8274-4b2f-9d36-85f542f97edc" providerId="AD" clId="Web-{2906A5C4-4AE4-4E11-926F-CBEF624CA5A3}" dt="2026-04-16T22:25:52.449" v="312"/>
+          <ac:spMkLst>
+            <pc:docMk/>
+            <pc:sldMk cId="1771695146" sldId="260"/>
+            <ac:spMk id="3" creationId="{40BB9F6D-3D7D-4107-95E7-B155B383AEA2}"/>
+          </ac:spMkLst>
+        </pc:spChg>
+        <pc:spChg chg="mod ord">
+          <ac:chgData name="Lóránt Márton" userId="S::lorant.marton_2021d@bolyai-szakkozep.hu::b174f32f-8274-4b2f-9d36-85f542f97edc" providerId="AD" clId="Web-{2906A5C4-4AE4-4E11-926F-CBEF624CA5A3}" dt="2026-04-16T22:31:23.567" v="343" actId="20577"/>
+          <ac:spMkLst>
+            <pc:docMk/>
+            <pc:sldMk cId="1771695146" sldId="260"/>
+            <ac:spMk id="6" creationId="{6F688BFE-C193-4FD2-8F80-1EBEEC16EF07}"/>
+          </ac:spMkLst>
+        </pc:spChg>
+        <pc:spChg chg="add">
+          <ac:chgData name="Lóránt Márton" userId="S::lorant.marton_2021d@bolyai-szakkozep.hu::b174f32f-8274-4b2f-9d36-85f542f97edc" providerId="AD" clId="Web-{2906A5C4-4AE4-4E11-926F-CBEF624CA5A3}" dt="2026-04-16T22:25:52.449" v="312"/>
+          <ac:spMkLst>
+            <pc:docMk/>
+            <pc:sldMk cId="1771695146" sldId="260"/>
+            <ac:spMk id="8" creationId="{5CF81D86-BDBA-477C-B7DD-8D359BB9965B}"/>
+          </ac:spMkLst>
+        </pc:spChg>
+        <pc:spChg chg="add">
+          <ac:chgData name="Lóránt Márton" userId="S::lorant.marton_2021d@bolyai-szakkozep.hu::b174f32f-8274-4b2f-9d36-85f542f97edc" providerId="AD" clId="Web-{2906A5C4-4AE4-4E11-926F-CBEF624CA5A3}" dt="2026-04-16T22:25:52.449" v="312"/>
+          <ac:spMkLst>
+            <pc:docMk/>
+            <pc:sldMk cId="1771695146" sldId="260"/>
+            <ac:spMk id="10" creationId="{88AA064E-5F6E-4024-BC28-EDDC3DFC70E1}"/>
+          </ac:spMkLst>
+        </pc:spChg>
+        <pc:spChg chg="add del">
+          <ac:chgData name="Lóránt Márton" userId="S::lorant.marton_2021d@bolyai-szakkozep.hu::b174f32f-8274-4b2f-9d36-85f542f97edc" providerId="AD" clId="Web-{2906A5C4-4AE4-4E11-926F-CBEF624CA5A3}" dt="2026-04-16T22:25:31.948" v="305"/>
+          <ac:spMkLst>
+            <pc:docMk/>
+            <pc:sldMk cId="1771695146" sldId="260"/>
+            <ac:spMk id="11" creationId="{E5958DBC-F4DA-42A8-8C52-860179790ECD}"/>
+          </ac:spMkLst>
+        </pc:spChg>
+        <pc:spChg chg="add">
+          <ac:chgData name="Lóránt Márton" userId="S::lorant.marton_2021d@bolyai-szakkozep.hu::b174f32f-8274-4b2f-9d36-85f542f97edc" providerId="AD" clId="Web-{2906A5C4-4AE4-4E11-926F-CBEF624CA5A3}" dt="2026-04-16T22:25:52.449" v="312"/>
+          <ac:spMkLst>
+            <pc:docMk/>
+            <pc:sldMk cId="1771695146" sldId="260"/>
+            <ac:spMk id="12" creationId="{03B29638-4838-4B9B-B9DB-96E542BAF3E6}"/>
+          </ac:spMkLst>
+        </pc:spChg>
+        <pc:spChg chg="add del">
+          <ac:chgData name="Lóránt Márton" userId="S::lorant.marton_2021d@bolyai-szakkozep.hu::b174f32f-8274-4b2f-9d36-85f542f97edc" providerId="AD" clId="Web-{2906A5C4-4AE4-4E11-926F-CBEF624CA5A3}" dt="2026-04-16T22:25:31.948" v="305"/>
+          <ac:spMkLst>
+            <pc:docMk/>
+            <pc:sldMk cId="1771695146" sldId="260"/>
+            <ac:spMk id="15" creationId="{51DDD252-D7C8-4CE5-9C61-D60D722BC217}"/>
+          </ac:spMkLst>
+        </pc:spChg>
+        <pc:spChg chg="add del">
+          <ac:chgData name="Lóránt Márton" userId="S::lorant.marton_2021d@bolyai-szakkozep.hu::b174f32f-8274-4b2f-9d36-85f542f97edc" providerId="AD" clId="Web-{2906A5C4-4AE4-4E11-926F-CBEF624CA5A3}" dt="2026-04-16T22:25:31.948" v="305"/>
+          <ac:spMkLst>
+            <pc:docMk/>
+            <pc:sldMk cId="1771695146" sldId="260"/>
+            <ac:spMk id="17" creationId="{2FBD75F5-C49C-4F6A-8D43-7A5939C23307}"/>
+          </ac:spMkLst>
+        </pc:spChg>
+        <pc:spChg chg="add del">
+          <ac:chgData name="Lóránt Márton" userId="S::lorant.marton_2021d@bolyai-szakkozep.hu::b174f32f-8274-4b2f-9d36-85f542f97edc" providerId="AD" clId="Web-{2906A5C4-4AE4-4E11-926F-CBEF624CA5A3}" dt="2026-04-16T22:25:34.402" v="307"/>
+          <ac:spMkLst>
+            <pc:docMk/>
+            <pc:sldMk cId="1771695146" sldId="260"/>
+            <ac:spMk id="19" creationId="{20E9A622-9996-4927-BBCD-AEE2687BEDAD}"/>
+          </ac:spMkLst>
+        </pc:spChg>
+        <pc:spChg chg="add del">
+          <ac:chgData name="Lóránt Márton" userId="S::lorant.marton_2021d@bolyai-szakkozep.hu::b174f32f-8274-4b2f-9d36-85f542f97edc" providerId="AD" clId="Web-{2906A5C4-4AE4-4E11-926F-CBEF624CA5A3}" dt="2026-04-16T22:25:34.402" v="307"/>
+          <ac:spMkLst>
+            <pc:docMk/>
+            <pc:sldMk cId="1771695146" sldId="260"/>
+            <ac:spMk id="20" creationId="{51DE3FC3-BAC1-4105-9620-4FB64EDCE876}"/>
+          </ac:spMkLst>
+        </pc:spChg>
+        <pc:spChg chg="add del">
+          <ac:chgData name="Lóránt Márton" userId="S::lorant.marton_2021d@bolyai-szakkozep.hu::b174f32f-8274-4b2f-9d36-85f542f97edc" providerId="AD" clId="Web-{2906A5C4-4AE4-4E11-926F-CBEF624CA5A3}" dt="2026-04-16T22:25:34.402" v="307"/>
+          <ac:spMkLst>
+            <pc:docMk/>
+            <pc:sldMk cId="1771695146" sldId="260"/>
+            <ac:spMk id="21" creationId="{CEF02B21-6D04-4A6A-B03E-CF7642D59161}"/>
+          </ac:spMkLst>
+        </pc:spChg>
+        <pc:spChg chg="add del">
+          <ac:chgData name="Lóránt Márton" userId="S::lorant.marton_2021d@bolyai-szakkozep.hu::b174f32f-8274-4b2f-9d36-85f542f97edc" providerId="AD" clId="Web-{2906A5C4-4AE4-4E11-926F-CBEF624CA5A3}" dt="2026-04-16T22:25:34.402" v="307"/>
+          <ac:spMkLst>
+            <pc:docMk/>
+            <pc:sldMk cId="1771695146" sldId="260"/>
+            <ac:spMk id="22" creationId="{97E39010-823C-439A-B438-FEEDF549083C}"/>
+          </ac:spMkLst>
+        </pc:spChg>
+        <pc:spChg chg="add del">
+          <ac:chgData name="Lóránt Márton" userId="S::lorant.marton_2021d@bolyai-szakkozep.hu::b174f32f-8274-4b2f-9d36-85f542f97edc" providerId="AD" clId="Web-{2906A5C4-4AE4-4E11-926F-CBEF624CA5A3}" dt="2026-04-16T22:25:44.230" v="309"/>
+          <ac:spMkLst>
+            <pc:docMk/>
+            <pc:sldMk cId="1771695146" sldId="260"/>
+            <ac:spMk id="24" creationId="{2F888C18-7E74-4A98-A7B4-A5C43583A482}"/>
+          </ac:spMkLst>
+        </pc:spChg>
+        <pc:spChg chg="add del">
+          <ac:chgData name="Lóránt Márton" userId="S::lorant.marton_2021d@bolyai-szakkozep.hu::b174f32f-8274-4b2f-9d36-85f542f97edc" providerId="AD" clId="Web-{2906A5C4-4AE4-4E11-926F-CBEF624CA5A3}" dt="2026-04-16T22:25:44.230" v="309"/>
+          <ac:spMkLst>
+            <pc:docMk/>
+            <pc:sldMk cId="1771695146" sldId="260"/>
+            <ac:spMk id="25" creationId="{20436840-698D-4B5F-A7C0-101AD48D861E}"/>
+          </ac:spMkLst>
+        </pc:spChg>
+        <pc:spChg chg="add del">
+          <ac:chgData name="Lóránt Márton" userId="S::lorant.marton_2021d@bolyai-szakkozep.hu::b174f32f-8274-4b2f-9d36-85f542f97edc" providerId="AD" clId="Web-{2906A5C4-4AE4-4E11-926F-CBEF624CA5A3}" dt="2026-04-16T22:25:44.230" v="309"/>
+          <ac:spMkLst>
+            <pc:docMk/>
+            <pc:sldMk cId="1771695146" sldId="260"/>
+            <ac:spMk id="26" creationId="{3682BE5A-770A-4799-BE6D-CE0BD0AD28C0}"/>
+          </ac:spMkLst>
+        </pc:spChg>
+        <pc:spChg chg="add del">
+          <ac:chgData name="Lóránt Márton" userId="S::lorant.marton_2021d@bolyai-szakkozep.hu::b174f32f-8274-4b2f-9d36-85f542f97edc" providerId="AD" clId="Web-{2906A5C4-4AE4-4E11-926F-CBEF624CA5A3}" dt="2026-04-16T22:25:44.230" v="309"/>
+          <ac:spMkLst>
+            <pc:docMk/>
+            <pc:sldMk cId="1771695146" sldId="260"/>
+            <ac:spMk id="27" creationId="{85B58713-80A3-4F72-8ADA-A63E6BA8BC00}"/>
+          </ac:spMkLst>
+        </pc:spChg>
+        <pc:picChg chg="add del mod ord">
+          <ac:chgData name="Lóránt Márton" userId="S::lorant.marton_2021d@bolyai-szakkozep.hu::b174f32f-8274-4b2f-9d36-85f542f97edc" providerId="AD" clId="Web-{2906A5C4-4AE4-4E11-926F-CBEF624CA5A3}" dt="2026-04-16T22:25:48.636" v="311"/>
+          <ac:picMkLst>
+            <pc:docMk/>
+            <pc:sldMk cId="1771695146" sldId="260"/>
+            <ac:picMk id="4" creationId="{F0EFF79E-B16E-131C-FB4F-E525C252DA53}"/>
+          </ac:picMkLst>
+        </pc:picChg>
+        <pc:picChg chg="add mod ord">
+          <ac:chgData name="Lóránt Márton" userId="S::lorant.marton_2021d@bolyai-szakkozep.hu::b174f32f-8274-4b2f-9d36-85f542f97edc" providerId="AD" clId="Web-{2906A5C4-4AE4-4E11-926F-CBEF624CA5A3}" dt="2026-04-16T22:25:52.449" v="312"/>
+          <ac:picMkLst>
+            <pc:docMk/>
+            <pc:sldMk cId="1771695146" sldId="260"/>
+            <ac:picMk id="5" creationId="{66BA4F1E-0E8A-67A8-E0B8-327818A8329E}"/>
+          </ac:picMkLst>
+        </pc:picChg>
+        <pc:cxnChg chg="add">
+          <ac:chgData name="Lóránt Márton" userId="S::lorant.marton_2021d@bolyai-szakkozep.hu::b174f32f-8274-4b2f-9d36-85f542f97edc" providerId="AD" clId="Web-{2906A5C4-4AE4-4E11-926F-CBEF624CA5A3}" dt="2026-04-16T22:25:52.449" v="312"/>
+          <ac:cxnSpMkLst>
+            <pc:docMk/>
+            <pc:sldMk cId="1771695146" sldId="260"/>
+            <ac:cxnSpMk id="9" creationId="{C65F3E9C-EF11-4F8F-A621-399C7A3E6401}"/>
+          </ac:cxnSpMkLst>
+        </pc:cxnChg>
+        <pc:cxnChg chg="add del">
+          <ac:chgData name="Lóránt Márton" userId="S::lorant.marton_2021d@bolyai-szakkozep.hu::b174f32f-8274-4b2f-9d36-85f542f97edc" providerId="AD" clId="Web-{2906A5C4-4AE4-4E11-926F-CBEF624CA5A3}" dt="2026-04-16T22:25:31.948" v="305"/>
+          <ac:cxnSpMkLst>
+            <pc:docMk/>
+            <pc:sldMk cId="1771695146" sldId="260"/>
+            <ac:cxnSpMk id="13" creationId="{79FCC9A9-2031-4283-9B27-34B62BB7F305}"/>
+          </ac:cxnSpMkLst>
+        </pc:cxnChg>
+      </pc:sldChg>
+      <pc:sldChg chg="addSp delSp modSp mod setBg">
+        <pc:chgData name="Lóránt Márton" userId="S::lorant.marton_2021d@bolyai-szakkozep.hu::b174f32f-8274-4b2f-9d36-85f542f97edc" providerId="AD" clId="Web-{2906A5C4-4AE4-4E11-926F-CBEF624CA5A3}" dt="2026-04-16T22:42:01.460" v="481" actId="20577"/>
+        <pc:sldMkLst>
+          <pc:docMk/>
+          <pc:sldMk cId="827314947" sldId="261"/>
+        </pc:sldMkLst>
+        <pc:spChg chg="mod">
+          <ac:chgData name="Lóránt Márton" userId="S::lorant.marton_2021d@bolyai-szakkozep.hu::b174f32f-8274-4b2f-9d36-85f542f97edc" providerId="AD" clId="Web-{2906A5C4-4AE4-4E11-926F-CBEF624CA5A3}" dt="2026-04-16T22:41:54.116" v="479"/>
+          <ac:spMkLst>
+            <pc:docMk/>
+            <pc:sldMk cId="827314947" sldId="261"/>
+            <ac:spMk id="2" creationId="{951C1428-2F34-450A-AD72-8821F6C34C8F}"/>
+          </ac:spMkLst>
+        </pc:spChg>
+        <pc:spChg chg="mod">
+          <ac:chgData name="Lóránt Márton" userId="S::lorant.marton_2021d@bolyai-szakkozep.hu::b174f32f-8274-4b2f-9d36-85f542f97edc" providerId="AD" clId="Web-{2906A5C4-4AE4-4E11-926F-CBEF624CA5A3}" dt="2026-04-16T22:41:54.116" v="479"/>
+          <ac:spMkLst>
+            <pc:docMk/>
+            <pc:sldMk cId="827314947" sldId="261"/>
+            <ac:spMk id="3" creationId="{F3F9ADAB-AB5E-44D4-AA3C-A591909E93BA}"/>
+          </ac:spMkLst>
+        </pc:spChg>
+        <pc:spChg chg="mod ord">
+          <ac:chgData name="Lóránt Márton" userId="S::lorant.marton_2021d@bolyai-szakkozep.hu::b174f32f-8274-4b2f-9d36-85f542f97edc" providerId="AD" clId="Web-{2906A5C4-4AE4-4E11-926F-CBEF624CA5A3}" dt="2026-04-16T22:42:01.460" v="481" actId="20577"/>
+          <ac:spMkLst>
+            <pc:docMk/>
+            <pc:sldMk cId="827314947" sldId="261"/>
+            <ac:spMk id="6" creationId="{DF936A1E-CCAA-4A40-83FD-55EF554A975F}"/>
+          </ac:spMkLst>
+        </pc:spChg>
+        <pc:spChg chg="add del">
+          <ac:chgData name="Lóránt Márton" userId="S::lorant.marton_2021d@bolyai-szakkozep.hu::b174f32f-8274-4b2f-9d36-85f542f97edc" providerId="AD" clId="Web-{2906A5C4-4AE4-4E11-926F-CBEF624CA5A3}" dt="2026-04-16T22:41:51.882" v="476"/>
+          <ac:spMkLst>
+            <pc:docMk/>
+            <pc:sldMk cId="827314947" sldId="261"/>
+            <ac:spMk id="11" creationId="{C33BF9DD-8A45-4EEE-B231-0A14D322E5F9}"/>
+          </ac:spMkLst>
+        </pc:spChg>
+        <pc:spChg chg="add del">
+          <ac:chgData name="Lóránt Márton" userId="S::lorant.marton_2021d@bolyai-szakkozep.hu::b174f32f-8274-4b2f-9d36-85f542f97edc" providerId="AD" clId="Web-{2906A5C4-4AE4-4E11-926F-CBEF624CA5A3}" dt="2026-04-16T22:41:51.882" v="476"/>
+          <ac:spMkLst>
+            <pc:docMk/>
+            <pc:sldMk cId="827314947" sldId="261"/>
+            <ac:spMk id="15" creationId="{D5FBCAC9-BD8B-4F3B-AD74-EF37D4211349}"/>
+          </ac:spMkLst>
+        </pc:spChg>
+        <pc:spChg chg="add del">
+          <ac:chgData name="Lóránt Márton" userId="S::lorant.marton_2021d@bolyai-szakkozep.hu::b174f32f-8274-4b2f-9d36-85f542f97edc" providerId="AD" clId="Web-{2906A5C4-4AE4-4E11-926F-CBEF624CA5A3}" dt="2026-04-16T22:41:51.882" v="476"/>
+          <ac:spMkLst>
+            <pc:docMk/>
+            <pc:sldMk cId="827314947" sldId="261"/>
+            <ac:spMk id="17" creationId="{9556C5A8-AD7E-4CE7-87BE-9EA3B5E1786F}"/>
+          </ac:spMkLst>
+        </pc:spChg>
+        <pc:picChg chg="add mod ord">
+          <ac:chgData name="Lóránt Márton" userId="S::lorant.marton_2021d@bolyai-szakkozep.hu::b174f32f-8274-4b2f-9d36-85f542f97edc" providerId="AD" clId="Web-{2906A5C4-4AE4-4E11-926F-CBEF624CA5A3}" dt="2026-04-16T22:41:54.116" v="479"/>
+          <ac:picMkLst>
+            <pc:docMk/>
+            <pc:sldMk cId="827314947" sldId="261"/>
+            <ac:picMk id="4" creationId="{8CC2CC8B-915F-A70A-2683-51484001FBCF}"/>
+          </ac:picMkLst>
+        </pc:picChg>
+        <pc:cxnChg chg="add del">
+          <ac:chgData name="Lóránt Márton" userId="S::lorant.marton_2021d@bolyai-szakkozep.hu::b174f32f-8274-4b2f-9d36-85f542f97edc" providerId="AD" clId="Web-{2906A5C4-4AE4-4E11-926F-CBEF624CA5A3}" dt="2026-04-16T22:41:51.882" v="476"/>
+          <ac:cxnSpMkLst>
+            <pc:docMk/>
+            <pc:sldMk cId="827314947" sldId="261"/>
+            <ac:cxnSpMk id="13" creationId="{9020DCC9-F851-4562-BB20-1AB3C51BFD08}"/>
+          </ac:cxnSpMkLst>
+        </pc:cxnChg>
+      </pc:sldChg>
+      <pc:sldChg chg="modSp">
+        <pc:chgData name="Lóránt Márton" userId="S::lorant.marton_2021d@bolyai-szakkozep.hu::b174f32f-8274-4b2f-9d36-85f542f97edc" providerId="AD" clId="Web-{2906A5C4-4AE4-4E11-926F-CBEF624CA5A3}" dt="2026-04-16T22:34:03.079" v="367" actId="20577"/>
+        <pc:sldMkLst>
+          <pc:docMk/>
+          <pc:sldMk cId="2037388110" sldId="268"/>
+        </pc:sldMkLst>
+        <pc:spChg chg="mod">
+          <ac:chgData name="Lóránt Márton" userId="S::lorant.marton_2021d@bolyai-szakkozep.hu::b174f32f-8274-4b2f-9d36-85f542f97edc" providerId="AD" clId="Web-{2906A5C4-4AE4-4E11-926F-CBEF624CA5A3}" dt="2026-04-16T22:34:03.079" v="367" actId="20577"/>
+          <ac:spMkLst>
+            <pc:docMk/>
+            <pc:sldMk cId="2037388110" sldId="268"/>
+            <ac:spMk id="3" creationId="{B5DEA170-EFCD-400D-BF22-700C61AFF98E}"/>
+          </ac:spMkLst>
+        </pc:spChg>
+      </pc:sldChg>
+      <pc:sldChg chg="addSp delSp modSp mod setBg">
+        <pc:chgData name="Lóránt Márton" userId="S::lorant.marton_2021d@bolyai-szakkozep.hu::b174f32f-8274-4b2f-9d36-85f542f97edc" providerId="AD" clId="Web-{2906A5C4-4AE4-4E11-926F-CBEF624CA5A3}" dt="2026-04-16T22:31:36.052" v="347" actId="20577"/>
+        <pc:sldMkLst>
+          <pc:docMk/>
+          <pc:sldMk cId="1902010810" sldId="269"/>
+        </pc:sldMkLst>
+        <pc:spChg chg="mod">
+          <ac:chgData name="Lóránt Márton" userId="S::lorant.marton_2021d@bolyai-szakkozep.hu::b174f32f-8274-4b2f-9d36-85f542f97edc" providerId="AD" clId="Web-{2906A5C4-4AE4-4E11-926F-CBEF624CA5A3}" dt="2026-04-16T22:22:46.988" v="299"/>
+          <ac:spMkLst>
+            <pc:docMk/>
+            <pc:sldMk cId="1902010810" sldId="269"/>
+            <ac:spMk id="2" creationId="{73937617-0EEA-49E9-9739-9908D3BD19E1}"/>
+          </ac:spMkLst>
+        </pc:spChg>
+        <pc:spChg chg="mod ord">
+          <ac:chgData name="Lóránt Márton" userId="S::lorant.marton_2021d@bolyai-szakkozep.hu::b174f32f-8274-4b2f-9d36-85f542f97edc" providerId="AD" clId="Web-{2906A5C4-4AE4-4E11-926F-CBEF624CA5A3}" dt="2026-04-16T22:22:23.847" v="295"/>
+          <ac:spMkLst>
+            <pc:docMk/>
+            <pc:sldMk cId="1902010810" sldId="269"/>
+            <ac:spMk id="3" creationId="{7F8FAFD7-A0EE-4272-8CA6-CE3A4A9D18AC}"/>
+          </ac:spMkLst>
+        </pc:spChg>
+        <pc:spChg chg="mod ord">
+          <ac:chgData name="Lóránt Márton" userId="S::lorant.marton_2021d@bolyai-szakkozep.hu::b174f32f-8274-4b2f-9d36-85f542f97edc" providerId="AD" clId="Web-{2906A5C4-4AE4-4E11-926F-CBEF624CA5A3}" dt="2026-04-16T22:31:36.052" v="347" actId="20577"/>
+          <ac:spMkLst>
+            <pc:docMk/>
+            <pc:sldMk cId="1902010810" sldId="269"/>
+            <ac:spMk id="6" creationId="{F95604C9-0C5F-4077-A986-49F6027AE45A}"/>
+          </ac:spMkLst>
+        </pc:spChg>
+        <pc:spChg chg="add del">
+          <ac:chgData name="Lóránt Márton" userId="S::lorant.marton_2021d@bolyai-szakkozep.hu::b174f32f-8274-4b2f-9d36-85f542f97edc" providerId="AD" clId="Web-{2906A5C4-4AE4-4E11-926F-CBEF624CA5A3}" dt="2026-04-16T22:22:46.973" v="298"/>
+          <ac:spMkLst>
+            <pc:docMk/>
+            <pc:sldMk cId="1902010810" sldId="269"/>
+            <ac:spMk id="12" creationId="{151FCA92-37FC-419D-880C-DEE030371675}"/>
+          </ac:spMkLst>
+        </pc:spChg>
+        <pc:spChg chg="add del">
+          <ac:chgData name="Lóránt Márton" userId="S::lorant.marton_2021d@bolyai-szakkozep.hu::b174f32f-8274-4b2f-9d36-85f542f97edc" providerId="AD" clId="Web-{2906A5C4-4AE4-4E11-926F-CBEF624CA5A3}" dt="2026-04-16T22:22:46.988" v="299"/>
+          <ac:spMkLst>
+            <pc:docMk/>
+            <pc:sldMk cId="1902010810" sldId="269"/>
+            <ac:spMk id="14" creationId="{49F734FC-80ED-4400-9FB7-5800EE74AE4C}"/>
+          </ac:spMkLst>
+        </pc:spChg>
+        <pc:spChg chg="add del">
+          <ac:chgData name="Lóránt Márton" userId="S::lorant.marton_2021d@bolyai-szakkozep.hu::b174f32f-8274-4b2f-9d36-85f542f97edc" providerId="AD" clId="Web-{2906A5C4-4AE4-4E11-926F-CBEF624CA5A3}" dt="2026-04-16T22:22:46.988" v="299"/>
+          <ac:spMkLst>
+            <pc:docMk/>
+            <pc:sldMk cId="1902010810" sldId="269"/>
+            <ac:spMk id="16" creationId="{F54C209B-0440-412E-BEBF-D8694B5A0A76}"/>
+          </ac:spMkLst>
+        </pc:spChg>
+        <pc:spChg chg="add">
+          <ac:chgData name="Lóránt Márton" userId="S::lorant.marton_2021d@bolyai-szakkozep.hu::b174f32f-8274-4b2f-9d36-85f542f97edc" providerId="AD" clId="Web-{2906A5C4-4AE4-4E11-926F-CBEF624CA5A3}" dt="2026-04-16T22:22:23.847" v="295"/>
+          <ac:spMkLst>
+            <pc:docMk/>
+            <pc:sldMk cId="1902010810" sldId="269"/>
+            <ac:spMk id="20" creationId="{FDA25563-C462-4DA6-BB84-8243A6C7DF68}"/>
+          </ac:spMkLst>
+        </pc:spChg>
+        <pc:spChg chg="add del">
+          <ac:chgData name="Lóránt Márton" userId="S::lorant.marton_2021d@bolyai-szakkozep.hu::b174f32f-8274-4b2f-9d36-85f542f97edc" providerId="AD" clId="Web-{2906A5C4-4AE4-4E11-926F-CBEF624CA5A3}" dt="2026-04-16T22:22:46.988" v="299"/>
+          <ac:spMkLst>
+            <pc:docMk/>
+            <pc:sldMk cId="1902010810" sldId="269"/>
+            <ac:spMk id="22" creationId="{64044755-AC7C-421A-B935-8BA9A23F876E}"/>
+          </ac:spMkLst>
+        </pc:spChg>
+        <pc:spChg chg="add del">
+          <ac:chgData name="Lóránt Márton" userId="S::lorant.marton_2021d@bolyai-szakkozep.hu::b174f32f-8274-4b2f-9d36-85f542f97edc" providerId="AD" clId="Web-{2906A5C4-4AE4-4E11-926F-CBEF624CA5A3}" dt="2026-04-16T22:22:46.973" v="298"/>
+          <ac:spMkLst>
+            <pc:docMk/>
+            <pc:sldMk cId="1902010810" sldId="269"/>
+            <ac:spMk id="24" creationId="{82225A9B-20AD-4869-96C9-770E8E704594}"/>
+          </ac:spMkLst>
+        </pc:spChg>
+        <pc:spChg chg="add del">
+          <ac:chgData name="Lóránt Márton" userId="S::lorant.marton_2021d@bolyai-szakkozep.hu::b174f32f-8274-4b2f-9d36-85f542f97edc" providerId="AD" clId="Web-{2906A5C4-4AE4-4E11-926F-CBEF624CA5A3}" dt="2026-04-16T22:22:46.988" v="299"/>
+          <ac:spMkLst>
+            <pc:docMk/>
+            <pc:sldMk cId="1902010810" sldId="269"/>
+            <ac:spMk id="26" creationId="{514D5E4E-F019-44AF-AF49-8FBBFBBE6B18}"/>
+          </ac:spMkLst>
+        </pc:spChg>
+        <pc:spChg chg="add del">
+          <ac:chgData name="Lóránt Márton" userId="S::lorant.marton_2021d@bolyai-szakkozep.hu::b174f32f-8274-4b2f-9d36-85f542f97edc" providerId="AD" clId="Web-{2906A5C4-4AE4-4E11-926F-CBEF624CA5A3}" dt="2026-04-16T22:22:46.973" v="298"/>
+          <ac:spMkLst>
+            <pc:docMk/>
+            <pc:sldMk cId="1902010810" sldId="269"/>
+            <ac:spMk id="31" creationId="{0D3048CC-BFEE-499F-968D-9681FE25454C}"/>
+          </ac:spMkLst>
+        </pc:spChg>
+        <pc:spChg chg="add del">
+          <ac:chgData name="Lóránt Márton" userId="S::lorant.marton_2021d@bolyai-szakkozep.hu::b174f32f-8274-4b2f-9d36-85f542f97edc" providerId="AD" clId="Web-{2906A5C4-4AE4-4E11-926F-CBEF624CA5A3}" dt="2026-04-16T22:22:46.973" v="298"/>
+          <ac:spMkLst>
+            <pc:docMk/>
+            <pc:sldMk cId="1902010810" sldId="269"/>
+            <ac:spMk id="33" creationId="{2AF095ED-34C6-4B6B-BF2F-B18C3C6CD2B7}"/>
+          </ac:spMkLst>
+        </pc:spChg>
+        <pc:spChg chg="add del">
+          <ac:chgData name="Lóránt Márton" userId="S::lorant.marton_2021d@bolyai-szakkozep.hu::b174f32f-8274-4b2f-9d36-85f542f97edc" providerId="AD" clId="Web-{2906A5C4-4AE4-4E11-926F-CBEF624CA5A3}" dt="2026-04-16T22:22:46.973" v="298"/>
+          <ac:spMkLst>
+            <pc:docMk/>
+            <pc:sldMk cId="1902010810" sldId="269"/>
+            <ac:spMk id="35" creationId="{E80E2106-26D1-4CFC-9F58-A3D915C7A9D1}"/>
+          </ac:spMkLst>
+        </pc:spChg>
+        <pc:spChg chg="add del">
+          <ac:chgData name="Lóránt Márton" userId="S::lorant.marton_2021d@bolyai-szakkozep.hu::b174f32f-8274-4b2f-9d36-85f542f97edc" providerId="AD" clId="Web-{2906A5C4-4AE4-4E11-926F-CBEF624CA5A3}" dt="2026-04-16T22:22:46.973" v="298"/>
+          <ac:spMkLst>
+            <pc:docMk/>
+            <pc:sldMk cId="1902010810" sldId="269"/>
+            <ac:spMk id="41" creationId="{B314DF03-4B84-4C63-9500-DC80BCA1BBFF}"/>
+          </ac:spMkLst>
+        </pc:spChg>
+        <pc:spChg chg="add del">
+          <ac:chgData name="Lóránt Márton" userId="S::lorant.marton_2021d@bolyai-szakkozep.hu::b174f32f-8274-4b2f-9d36-85f542f97edc" providerId="AD" clId="Web-{2906A5C4-4AE4-4E11-926F-CBEF624CA5A3}" dt="2026-04-16T22:22:46.973" v="298"/>
+          <ac:spMkLst>
+            <pc:docMk/>
+            <pc:sldMk cId="1902010810" sldId="269"/>
+            <ac:spMk id="45" creationId="{57B513E8-3CAA-4B4E-92DE-D3EA3E17B3B6}"/>
+          </ac:spMkLst>
+        </pc:spChg>
+        <pc:spChg chg="add">
+          <ac:chgData name="Lóránt Márton" userId="S::lorant.marton_2021d@bolyai-szakkozep.hu::b174f32f-8274-4b2f-9d36-85f542f97edc" providerId="AD" clId="Web-{2906A5C4-4AE4-4E11-926F-CBEF624CA5A3}" dt="2026-04-16T22:22:46.988" v="299"/>
+          <ac:spMkLst>
+            <pc:docMk/>
+            <pc:sldMk cId="1902010810" sldId="269"/>
+            <ac:spMk id="47" creationId="{04DD3E41-33C2-4660-BB4C-BBCF07F65FCD}"/>
+          </ac:spMkLst>
+        </pc:spChg>
+        <pc:spChg chg="add">
+          <ac:chgData name="Lóránt Márton" userId="S::lorant.marton_2021d@bolyai-szakkozep.hu::b174f32f-8274-4b2f-9d36-85f542f97edc" providerId="AD" clId="Web-{2906A5C4-4AE4-4E11-926F-CBEF624CA5A3}" dt="2026-04-16T22:22:46.988" v="299"/>
+          <ac:spMkLst>
+            <pc:docMk/>
+            <pc:sldMk cId="1902010810" sldId="269"/>
+            <ac:spMk id="48" creationId="{BA8475A3-3952-408D-8E93-626076E6D360}"/>
+          </ac:spMkLst>
+        </pc:spChg>
+        <pc:spChg chg="add">
+          <ac:chgData name="Lóránt Márton" userId="S::lorant.marton_2021d@bolyai-szakkozep.hu::b174f32f-8274-4b2f-9d36-85f542f97edc" providerId="AD" clId="Web-{2906A5C4-4AE4-4E11-926F-CBEF624CA5A3}" dt="2026-04-16T22:22:46.988" v="299"/>
+          <ac:spMkLst>
+            <pc:docMk/>
+            <pc:sldMk cId="1902010810" sldId="269"/>
+            <ac:spMk id="49" creationId="{2D57056C-3580-48E4-9666-53A445F49042}"/>
+          </ac:spMkLst>
+        </pc:spChg>
+        <pc:spChg chg="add">
+          <ac:chgData name="Lóránt Márton" userId="S::lorant.marton_2021d@bolyai-szakkozep.hu::b174f32f-8274-4b2f-9d36-85f542f97edc" providerId="AD" clId="Web-{2906A5C4-4AE4-4E11-926F-CBEF624CA5A3}" dt="2026-04-16T22:22:46.988" v="299"/>
+          <ac:spMkLst>
+            <pc:docMk/>
+            <pc:sldMk cId="1902010810" sldId="269"/>
+            <ac:spMk id="51" creationId="{0480D754-2EAA-46BD-A784-B04FC0A6F95D}"/>
+          </ac:spMkLst>
+        </pc:spChg>
+        <pc:spChg chg="add">
+          <ac:chgData name="Lóránt Márton" userId="S::lorant.marton_2021d@bolyai-szakkozep.hu::b174f32f-8274-4b2f-9d36-85f542f97edc" providerId="AD" clId="Web-{2906A5C4-4AE4-4E11-926F-CBEF624CA5A3}" dt="2026-04-16T22:22:46.988" v="299"/>
+          <ac:spMkLst>
+            <pc:docMk/>
+            <pc:sldMk cId="1902010810" sldId="269"/>
+            <ac:spMk id="53" creationId="{14BF5C5C-12B0-46A7-8912-9751C89D4779}"/>
+          </ac:spMkLst>
+        </pc:spChg>
+        <pc:picChg chg="add mod">
+          <ac:chgData name="Lóránt Márton" userId="S::lorant.marton_2021d@bolyai-szakkozep.hu::b174f32f-8274-4b2f-9d36-85f542f97edc" providerId="AD" clId="Web-{2906A5C4-4AE4-4E11-926F-CBEF624CA5A3}" dt="2026-04-16T22:21:30.861" v="291" actId="1076"/>
+          <ac:picMkLst>
+            <pc:docMk/>
+            <pc:sldMk cId="1902010810" sldId="269"/>
+            <ac:picMk id="4" creationId="{E741150A-5829-71A7-7417-90BF5979770A}"/>
+          </ac:picMkLst>
+        </pc:picChg>
+        <pc:picChg chg="add mod">
+          <ac:chgData name="Lóránt Márton" userId="S::lorant.marton_2021d@bolyai-szakkozep.hu::b174f32f-8274-4b2f-9d36-85f542f97edc" providerId="AD" clId="Web-{2906A5C4-4AE4-4E11-926F-CBEF624CA5A3}" dt="2026-04-16T22:21:58.627" v="293" actId="1076"/>
+          <ac:picMkLst>
+            <pc:docMk/>
+            <pc:sldMk cId="1902010810" sldId="269"/>
+            <ac:picMk id="5" creationId="{D85355F7-8BC0-37A8-57C4-4D7A2D67E9C5}"/>
+          </ac:picMkLst>
+        </pc:picChg>
+        <pc:picChg chg="add mod">
+          <ac:chgData name="Lóránt Márton" userId="S::lorant.marton_2021d@bolyai-szakkozep.hu::b174f32f-8274-4b2f-9d36-85f542f97edc" providerId="AD" clId="Web-{2906A5C4-4AE4-4E11-926F-CBEF624CA5A3}" dt="2026-04-16T22:22:20.409" v="294"/>
+          <ac:picMkLst>
+            <pc:docMk/>
+            <pc:sldMk cId="1902010810" sldId="269"/>
+            <ac:picMk id="7" creationId="{CDCE5BEE-3251-ECFE-2CB9-404589FDBD01}"/>
+          </ac:picMkLst>
+        </pc:picChg>
+        <pc:picChg chg="add mod">
+          <ac:chgData name="Lóránt Márton" userId="S::lorant.marton_2021d@bolyai-szakkozep.hu::b174f32f-8274-4b2f-9d36-85f542f97edc" providerId="AD" clId="Web-{2906A5C4-4AE4-4E11-926F-CBEF624CA5A3}" dt="2026-04-16T22:22:40.519" v="296"/>
+          <ac:picMkLst>
+            <pc:docMk/>
+            <pc:sldMk cId="1902010810" sldId="269"/>
+            <ac:picMk id="8" creationId="{D7270AE7-68E6-F069-E67C-AA0B51588A77}"/>
+          </ac:picMkLst>
+        </pc:picChg>
+      </pc:sldChg>
+      <pc:sldChg chg="modSp">
+        <pc:chgData name="Lóránt Márton" userId="S::lorant.marton_2021d@bolyai-szakkozep.hu::b174f32f-8274-4b2f-9d36-85f542f97edc" providerId="AD" clId="Web-{2906A5C4-4AE4-4E11-926F-CBEF624CA5A3}" dt="2026-04-16T22:12:17.389" v="131" actId="20577"/>
+        <pc:sldMkLst>
+          <pc:docMk/>
+          <pc:sldMk cId="3153495921" sldId="270"/>
+        </pc:sldMkLst>
+        <pc:spChg chg="mod">
+          <ac:chgData name="Lóránt Márton" userId="S::lorant.marton_2021d@bolyai-szakkozep.hu::b174f32f-8274-4b2f-9d36-85f542f97edc" providerId="AD" clId="Web-{2906A5C4-4AE4-4E11-926F-CBEF624CA5A3}" dt="2026-04-16T22:12:17.389" v="131" actId="20577"/>
+          <ac:spMkLst>
+            <pc:docMk/>
+            <pc:sldMk cId="3153495921" sldId="270"/>
+            <ac:spMk id="3" creationId="{E608CE5A-4348-42F9-9B1E-B39DD46CCE59}"/>
+          </ac:spMkLst>
+        </pc:spChg>
+      </pc:sldChg>
+      <pc:sldChg chg="addSp modSp mod setBg">
+        <pc:chgData name="Lóránt Márton" userId="S::lorant.marton_2021d@bolyai-szakkozep.hu::b174f32f-8274-4b2f-9d36-85f542f97edc" providerId="AD" clId="Web-{2906A5C4-4AE4-4E11-926F-CBEF624CA5A3}" dt="2026-04-16T22:31:08.317" v="342" actId="20577"/>
+        <pc:sldMkLst>
+          <pc:docMk/>
+          <pc:sldMk cId="225410992" sldId="271"/>
+        </pc:sldMkLst>
+        <pc:spChg chg="mod">
+          <ac:chgData name="Lóránt Márton" userId="S::lorant.marton_2021d@bolyai-szakkozep.hu::b174f32f-8274-4b2f-9d36-85f542f97edc" providerId="AD" clId="Web-{2906A5C4-4AE4-4E11-926F-CBEF624CA5A3}" dt="2026-04-16T22:30:59.504" v="340"/>
+          <ac:spMkLst>
+            <pc:docMk/>
+            <pc:sldMk cId="225410992" sldId="271"/>
+            <ac:spMk id="2" creationId="{9E116119-E4EB-426C-895D-61CB516FE197}"/>
+          </ac:spMkLst>
+        </pc:spChg>
+        <pc:spChg chg="mod">
+          <ac:chgData name="Lóránt Márton" userId="S::lorant.marton_2021d@bolyai-szakkozep.hu::b174f32f-8274-4b2f-9d36-85f542f97edc" providerId="AD" clId="Web-{2906A5C4-4AE4-4E11-926F-CBEF624CA5A3}" dt="2026-04-16T22:30:59.504" v="340"/>
+          <ac:spMkLst>
+            <pc:docMk/>
+            <pc:sldMk cId="225410992" sldId="271"/>
+            <ac:spMk id="3" creationId="{705B8120-5F93-418B-9EFC-A3E1219404D1}"/>
+          </ac:spMkLst>
+        </pc:spChg>
+        <pc:spChg chg="mod ord">
+          <ac:chgData name="Lóránt Márton" userId="S::lorant.marton_2021d@bolyai-szakkozep.hu::b174f32f-8274-4b2f-9d36-85f542f97edc" providerId="AD" clId="Web-{2906A5C4-4AE4-4E11-926F-CBEF624CA5A3}" dt="2026-04-16T22:31:08.317" v="342" actId="20577"/>
+          <ac:spMkLst>
+            <pc:docMk/>
+            <pc:sldMk cId="225410992" sldId="271"/>
+            <ac:spMk id="6" creationId="{0563A050-6BD6-4919-9F4A-61F0E692FCC3}"/>
+          </ac:spMkLst>
+        </pc:spChg>
+        <pc:picChg chg="add mod">
+          <ac:chgData name="Lóránt Márton" userId="S::lorant.marton_2021d@bolyai-szakkozep.hu::b174f32f-8274-4b2f-9d36-85f542f97edc" providerId="AD" clId="Web-{2906A5C4-4AE4-4E11-926F-CBEF624CA5A3}" dt="2026-04-16T22:30:59.504" v="340"/>
+          <ac:picMkLst>
+            <pc:docMk/>
+            <pc:sldMk cId="225410992" sldId="271"/>
+            <ac:picMk id="4" creationId="{BA0CD784-254A-FCAD-7303-B34227FD44EC}"/>
+          </ac:picMkLst>
+        </pc:picChg>
+      </pc:sldChg>
+    </pc:docChg>
+  </pc:docChgLst>
+  <pc:docChgLst>
+    <pc:chgData name="Lóránt Márton" userId="S::lorant.marton_2021d@bolyai-szakkozep.hu::b174f32f-8274-4b2f-9d36-85f542f97edc" providerId="AD" clId="Web-{AA720138-E68B-40D6-B653-E279C41F116A}"/>
+    <pc:docChg chg="modSld">
+      <pc:chgData name="Lóránt Márton" userId="S::lorant.marton_2021d@bolyai-szakkozep.hu::b174f32f-8274-4b2f-9d36-85f542f97edc" providerId="AD" clId="Web-{AA720138-E68B-40D6-B653-E279C41F116A}" dt="2026-04-16T22:02:27.183" v="11"/>
+      <pc:docMkLst>
+        <pc:docMk/>
+      </pc:docMkLst>
+      <pc:sldChg chg="addSp delSp modSp">
+        <pc:chgData name="Lóránt Márton" userId="S::lorant.marton_2021d@bolyai-szakkozep.hu::b174f32f-8274-4b2f-9d36-85f542f97edc" providerId="AD" clId="Web-{AA720138-E68B-40D6-B653-E279C41F116A}" dt="2026-04-16T22:02:27.183" v="11"/>
+        <pc:sldMkLst>
+          <pc:docMk/>
+          <pc:sldMk cId="1242175080" sldId="259"/>
+        </pc:sldMkLst>
+        <pc:spChg chg="del">
+          <ac:chgData name="Lóránt Márton" userId="S::lorant.marton_2021d@bolyai-szakkozep.hu::b174f32f-8274-4b2f-9d36-85f542f97edc" providerId="AD" clId="Web-{AA720138-E68B-40D6-B653-E279C41F116A}" dt="2026-04-16T22:02:04.007" v="4"/>
+          <ac:spMkLst>
+            <pc:docMk/>
+            <pc:sldMk cId="1242175080" sldId="259"/>
+            <ac:spMk id="3" creationId="{D149A78B-7CDB-4F64-B5F9-5AE1B29651B4}"/>
+          </ac:spMkLst>
+        </pc:spChg>
+        <pc:spChg chg="add del mod">
+          <ac:chgData name="Lóránt Márton" userId="S::lorant.marton_2021d@bolyai-szakkozep.hu::b174f32f-8274-4b2f-9d36-85f542f97edc" providerId="AD" clId="Web-{AA720138-E68B-40D6-B653-E279C41F116A}" dt="2026-04-16T22:01:20.045" v="3"/>
+          <ac:spMkLst>
+            <pc:docMk/>
+            <pc:sldMk cId="1242175080" sldId="259"/>
+            <ac:spMk id="4" creationId="{59F1C6F1-21D6-F1E7-1CA7-41BBDDB3B05E}"/>
+          </ac:spMkLst>
+        </pc:spChg>
+        <pc:spChg chg="add mod">
+          <ac:chgData name="Lóránt Márton" userId="S::lorant.marton_2021d@bolyai-szakkozep.hu::b174f32f-8274-4b2f-9d36-85f542f97edc" providerId="AD" clId="Web-{AA720138-E68B-40D6-B653-E279C41F116A}" dt="2026-04-16T22:02:27.183" v="11"/>
+          <ac:spMkLst>
+            <pc:docMk/>
+            <pc:sldMk cId="1242175080" sldId="259"/>
+            <ac:spMk id="8" creationId="{3F0260B1-7327-78F3-B361-294021CCFD33}"/>
+          </ac:spMkLst>
+        </pc:spChg>
+        <pc:picChg chg="add del mod ord">
+          <ac:chgData name="Lóránt Márton" userId="S::lorant.marton_2021d@bolyai-szakkozep.hu::b174f32f-8274-4b2f-9d36-85f542f97edc" providerId="AD" clId="Web-{AA720138-E68B-40D6-B653-E279C41F116A}" dt="2026-04-16T22:02:27.183" v="11"/>
+          <ac:picMkLst>
+            <pc:docMk/>
+            <pc:sldMk cId="1242175080" sldId="259"/>
+            <ac:picMk id="5" creationId="{18D620CA-8BE4-E021-FBD0-D6AF65C3DBC1}"/>
+          </ac:picMkLst>
+        </pc:picChg>
+      </pc:sldChg>
+    </pc:docChg>
+  </pc:docChgLst>
+</pc:chgInfo>
+</file>
+
 <file path=ppt/notesMasters/notesMaster1.xml><?xml version="1.0" encoding="utf-8"?>
 <p:notesMaster xmlns:a="http://schemas.openxmlformats.org/drawingml/2006/main" xmlns:r="http://schemas.openxmlformats.org/officeDocument/2006/relationships" xmlns:p="http://schemas.openxmlformats.org/presentationml/2006/main">
   <p:cSld>
@@ -528,13 +1285,6 @@
             <a:schemeClr val="lt1"/>
           </a:fontRef>
         </p:style>
-        <p:txBody>
-          <a:bodyPr/>
-          <a:lstStyle/>
-          <a:p>
-            <a:endParaRPr lang="hu-HU"/>
-          </a:p>
-        </p:txBody>
       </p:sp>
       <p:sp>
         <p:nvSpPr>
@@ -573,13 +1323,6 @@
             <a:schemeClr val="lt1"/>
           </a:fontRef>
         </p:style>
-        <p:txBody>
-          <a:bodyPr/>
-          <a:lstStyle/>
-          <a:p>
-            <a:endParaRPr lang="hu-HU"/>
-          </a:p>
-        </p:txBody>
       </p:sp>
       <p:sp>
         <p:nvSpPr>
@@ -3494,13 +4237,6 @@
             <a:schemeClr val="lt1"/>
           </a:fontRef>
         </p:style>
-        <p:txBody>
-          <a:bodyPr/>
-          <a:lstStyle/>
-          <a:p>
-            <a:endParaRPr lang="hu-HU"/>
-          </a:p>
-        </p:txBody>
       </p:sp>
       <p:sp>
         <p:nvSpPr>
@@ -3539,13 +4275,6 @@
             <a:schemeClr val="lt1"/>
           </a:fontRef>
         </p:style>
-        <p:txBody>
-          <a:bodyPr/>
-          <a:lstStyle/>
-          <a:p>
-            <a:endParaRPr lang="hu-HU"/>
-          </a:p>
-        </p:txBody>
       </p:sp>
       <p:sp>
         <p:nvSpPr>
@@ -4260,7 +4989,7 @@
           </a:xfrm>
         </p:spPr>
         <p:txBody>
-          <a:bodyPr>
+          <a:bodyPr vert="horz" lIns="91440" tIns="45720" rIns="91440" bIns="45720" rtlCol="0" anchor="t">
             <a:normAutofit lnSpcReduction="10000"/>
           </a:bodyPr>
           <a:lstStyle/>
@@ -4275,25 +5004,25 @@
           </a:p>
           <a:p>
             <a:r>
-              <a:rPr lang="hu-HU" dirty="0">
-                <a:latin typeface="Times New Roman" panose="02020603050405020304" pitchFamily="18" charset="0"/>
-                <a:cs typeface="Times New Roman" panose="02020603050405020304" pitchFamily="18" charset="0"/>
+              <a:rPr lang="hu-HU">
+                <a:latin typeface="Times New Roman"/>
+                <a:cs typeface="Times New Roman"/>
               </a:rPr>
-              <a:t>Tagok: Lóránt Márton, Kovács Kristóf</a:t>
-            </a:r>
-          </a:p>
-          <a:p>
-            <a:r>
-              <a:rPr lang="hu-HU" dirty="0" err="1">
-                <a:latin typeface="Times New Roman" panose="02020603050405020304" pitchFamily="18" charset="0"/>
-                <a:cs typeface="Times New Roman" panose="02020603050405020304" pitchFamily="18" charset="0"/>
+              <a:t>Készítette: Lóránt Márton, Kovács Kristóf</a:t>
+            </a:r>
+          </a:p>
+          <a:p>
+            <a:r>
+              <a:rPr lang="hu-HU" err="1">
+                <a:latin typeface="Times New Roman"/>
+                <a:cs typeface="Times New Roman"/>
               </a:rPr>
               <a:t>bmszc</a:t>
             </a:r>
             <a:r>
               <a:rPr lang="hu-HU" dirty="0">
-                <a:latin typeface="Times New Roman" panose="02020603050405020304" pitchFamily="18" charset="0"/>
-                <a:cs typeface="Times New Roman" panose="02020603050405020304" pitchFamily="18" charset="0"/>
+                <a:latin typeface="Times New Roman"/>
+                <a:cs typeface="Times New Roman"/>
               </a:rPr>
               <a:t> bolyai János műszaki technikum és kollégium</a:t>
             </a:r>
@@ -4395,6 +5124,14 @@
 <file path=ppt/slides/slide10.xml><?xml version="1.0" encoding="utf-8"?>
 <p:sld xmlns:a="http://schemas.openxmlformats.org/drawingml/2006/main" xmlns:r="http://schemas.openxmlformats.org/officeDocument/2006/relationships" xmlns:p="http://schemas.openxmlformats.org/presentationml/2006/main">
   <p:cSld>
+    <p:bg>
+      <p:bgPr>
+        <a:solidFill>
+          <a:schemeClr val="bg1"/>
+        </a:solidFill>
+        <a:effectLst/>
+      </p:bgPr>
+    </p:bg>
     <p:spTree>
       <p:nvGrpSpPr>
         <p:cNvPr id="1" name=""/>
@@ -4425,18 +5162,29 @@
             <p:ph type="title"/>
           </p:nvPr>
         </p:nvSpPr>
-        <p:spPr/>
-        <p:txBody>
-          <a:bodyPr/>
+        <p:spPr>
+          <a:xfrm>
+            <a:off x="1097280" y="286603"/>
+            <a:ext cx="10058400" cy="1450757"/>
+          </a:xfrm>
+        </p:spPr>
+        <p:txBody>
+          <a:bodyPr>
+            <a:normAutofit/>
+          </a:bodyPr>
           <a:lstStyle/>
           <a:p>
             <a:r>
-              <a:rPr lang="hu-HU" dirty="0">
-                <a:latin typeface="Times New Roman" panose="02020603050405020304" pitchFamily="18" charset="0"/>
-                <a:cs typeface="Times New Roman" panose="02020603050405020304" pitchFamily="18" charset="0"/>
+              <a:rPr lang="hu-HU">
+                <a:latin typeface="Times New Roman"/>
+                <a:cs typeface="Times New Roman"/>
               </a:rPr>
               <a:t>Összegzés és kitekintés</a:t>
             </a:r>
+            <a:endParaRPr lang="hu-HU" dirty="0">
+              <a:latin typeface="Times New Roman" panose="02020603050405020304" pitchFamily="18" charset="0"/>
+              <a:cs typeface="Times New Roman" panose="02020603050405020304" pitchFamily="18" charset="0"/>
+            </a:endParaRPr>
           </a:p>
         </p:txBody>
       </p:sp>
@@ -4456,69 +5204,127 @@
             <p:ph idx="1"/>
           </p:nvPr>
         </p:nvSpPr>
-        <p:spPr/>
-        <p:txBody>
-          <a:bodyPr/>
+        <p:spPr>
+          <a:xfrm>
+            <a:off x="1097279" y="1845734"/>
+            <a:ext cx="6454987" cy="4023360"/>
+          </a:xfrm>
+        </p:spPr>
+        <p:txBody>
+          <a:bodyPr vert="horz" lIns="0" tIns="45720" rIns="0" bIns="45720" rtlCol="0">
+            <a:normAutofit/>
+          </a:bodyPr>
           <a:lstStyle/>
           <a:p>
-            <a:pPr marL="0" indent="0">
-              <a:buNone/>
-            </a:pPr>
-            <a:r>
-              <a:rPr lang="hu-HU" dirty="0">
-                <a:latin typeface="Times New Roman" panose="02020603050405020304" pitchFamily="18" charset="0"/>
-                <a:cs typeface="Times New Roman" panose="02020603050405020304" pitchFamily="18" charset="0"/>
+            <a:r>
+              <a:rPr lang="hu-HU">
+                <a:ea typeface="Calibri"/>
+                <a:cs typeface="Calibri"/>
               </a:rPr>
-              <a:t>Továbbfejlesztési lehetőségek:</a:t>
-            </a:r>
-          </a:p>
-          <a:p>
-            <a:pPr>
-              <a:buFont typeface="Courier New" panose="02070309020205020404" pitchFamily="49" charset="0"/>
+              <a:t>További fejlesztési lehetőségek:</a:t>
+            </a:r>
+          </a:p>
+          <a:p>
+            <a:pPr marL="383540" lvl="1">
+              <a:buFont typeface="Courier New" panose="020F0502020204030204" pitchFamily="34" charset="0"/>
               <a:buChar char="o"/>
             </a:pPr>
             <a:r>
-              <a:rPr lang="hu-HU" dirty="0">
-                <a:latin typeface="Times New Roman" panose="02020603050405020304" pitchFamily="18" charset="0"/>
-                <a:cs typeface="Times New Roman" panose="02020603050405020304" pitchFamily="18" charset="0"/>
+              <a:rPr lang="hu-HU">
+                <a:ea typeface="Calibri"/>
+                <a:cs typeface="Calibri"/>
               </a:rPr>
               <a:t>Tag kezelés</a:t>
             </a:r>
-          </a:p>
-          <a:p>
-            <a:pPr>
-              <a:buFont typeface="Courier New" panose="02070309020205020404" pitchFamily="49" charset="0"/>
+            <a:endParaRPr lang="hu-HU" dirty="0">
+              <a:ea typeface="Calibri"/>
+              <a:cs typeface="Calibri"/>
+            </a:endParaRPr>
+          </a:p>
+          <a:p>
+            <a:pPr marL="383540" lvl="1">
+              <a:buFont typeface="Courier New" panose="020F0502020204030204" pitchFamily="34" charset="0"/>
               <a:buChar char="o"/>
             </a:pPr>
             <a:r>
-              <a:rPr lang="hu-HU" dirty="0">
-                <a:latin typeface="Times New Roman" panose="02020603050405020304" pitchFamily="18" charset="0"/>
-                <a:cs typeface="Times New Roman" panose="02020603050405020304" pitchFamily="18" charset="0"/>
+              <a:rPr lang="hu-HU">
+                <a:ea typeface="Calibri"/>
+                <a:cs typeface="Calibri"/>
               </a:rPr>
-              <a:t>Kívánság lista vagy „kedvencek” egy felhasználónak</a:t>
-            </a:r>
-          </a:p>
-          <a:p>
-            <a:pPr>
-              <a:buFont typeface="Courier New" panose="02070309020205020404" pitchFamily="49" charset="0"/>
+              <a:t>Kívánság lista vagy kedvencek egy felhasználónak</a:t>
+            </a:r>
+            <a:endParaRPr lang="hu-HU" dirty="0">
+              <a:ea typeface="Calibri"/>
+              <a:cs typeface="Calibri"/>
+            </a:endParaRPr>
+          </a:p>
+          <a:p>
+            <a:pPr marL="383540" lvl="1">
+              <a:buFont typeface="Courier New" panose="020F0502020204030204" pitchFamily="34" charset="0"/>
               <a:buChar char="o"/>
             </a:pPr>
             <a:r>
-              <a:rPr lang="hu-HU" dirty="0">
-                <a:latin typeface="Times New Roman" panose="02020603050405020304" pitchFamily="18" charset="0"/>
-                <a:cs typeface="Times New Roman" panose="02020603050405020304" pitchFamily="18" charset="0"/>
+              <a:rPr lang="hu-HU">
+                <a:ea typeface="Calibri"/>
+                <a:cs typeface="Calibri"/>
               </a:rPr>
               <a:t>Ajánlások előző kölcsönzések alapján</a:t>
             </a:r>
-          </a:p>
-          <a:p>
             <a:endParaRPr lang="hu-HU" dirty="0">
-              <a:latin typeface="Times New Roman" panose="02020603050405020304" pitchFamily="18" charset="0"/>
-              <a:cs typeface="Times New Roman" panose="02020603050405020304" pitchFamily="18" charset="0"/>
+              <a:ea typeface="Calibri"/>
+              <a:cs typeface="Calibri"/>
             </a:endParaRPr>
           </a:p>
-        </p:txBody>
-      </p:sp>
+          <a:p>
+            <a:pPr marL="383540" lvl="1">
+              <a:buFont typeface="Courier New" panose="020F0502020204030204" pitchFamily="34" charset="0"/>
+              <a:buChar char="o"/>
+            </a:pPr>
+            <a:r>
+              <a:rPr lang="hu-HU">
+                <a:ea typeface="Calibri"/>
+                <a:cs typeface="Calibri"/>
+              </a:rPr>
+              <a:t>Felhasználói adatok módosítása</a:t>
+            </a:r>
+            <a:endParaRPr lang="hu-HU" dirty="0">
+              <a:ea typeface="Calibri"/>
+              <a:cs typeface="Calibri"/>
+            </a:endParaRPr>
+          </a:p>
+        </p:txBody>
+      </p:sp>
+      <p:pic>
+        <p:nvPicPr>
+          <p:cNvPr id="4" name="Kép 3" descr="3 Steps for a Successful Upgrade`">
+            <a:extLst>
+              <a:ext uri="{FF2B5EF4-FFF2-40B4-BE49-F238E27FC236}">
+                <a16:creationId xmlns:a16="http://schemas.microsoft.com/office/drawing/2014/main" id="{BA0CD784-254A-FCAD-7303-B34227FD44EC}"/>
+              </a:ext>
+            </a:extLst>
+          </p:cNvPr>
+          <p:cNvPicPr>
+            <a:picLocks noChangeAspect="1"/>
+          </p:cNvPicPr>
+          <p:nvPr/>
+        </p:nvPicPr>
+        <p:blipFill>
+          <a:blip r:embed="rId2"/>
+          <a:srcRect l="16546" r="15712"/>
+          <a:stretch>
+            <a:fillRect/>
+          </a:stretch>
+        </p:blipFill>
+        <p:spPr>
+          <a:xfrm>
+            <a:off x="8020570" y="1916318"/>
+            <a:ext cx="3135109" cy="3471012"/>
+          </a:xfrm>
+          <a:prstGeom prst="rect">
+            <a:avLst/>
+          </a:prstGeom>
+        </p:spPr>
+      </p:pic>
       <p:sp>
         <p:nvSpPr>
           <p:cNvPr id="6" name="Dia számának helye 5">
@@ -4535,19 +5341,40 @@
             <p:ph type="sldNum" sz="quarter" idx="12"/>
           </p:nvPr>
         </p:nvSpPr>
-        <p:spPr/>
-        <p:txBody>
-          <a:bodyPr/>
+        <p:spPr>
+          <a:xfrm>
+            <a:off x="9900458" y="6459785"/>
+            <a:ext cx="1312025" cy="365125"/>
+          </a:xfrm>
+        </p:spPr>
+        <p:txBody>
+          <a:bodyPr vert="horz" lIns="91440" tIns="45720" rIns="91440" bIns="45720" rtlCol="0" anchor="ctr">
+            <a:noAutofit/>
+          </a:bodyPr>
           <a:lstStyle/>
           <a:p>
+            <a:pPr>
+              <a:spcAft>
+                <a:spcPts val="600"/>
+              </a:spcAft>
+            </a:pPr>
             <a:fld id="{5444FD88-FB79-4B01-A96D-DDA513F5DE89}" type="slidenum">
-              <a:rPr lang="hu-HU" sz="2000" smtClean="0"/>
+              <a:rPr lang="hu-HU" sz="2000" dirty="0" smtClean="0"/>
+              <a:pPr>
+                <a:spcAft>
+                  <a:spcPts val="600"/>
+                </a:spcAft>
+              </a:pPr>
               <a:t>10</a:t>
             </a:fld>
             <a:r>
-              <a:rPr lang="hu-HU" sz="2000" dirty="0"/>
+              <a:rPr lang="hu-HU" sz="2000"/>
               <a:t>/11</a:t>
             </a:r>
+            <a:endParaRPr lang="hu-HU" sz="2000">
+              <a:ea typeface="Calibri"/>
+              <a:cs typeface="Calibri"/>
+            </a:endParaRPr>
           </a:p>
         </p:txBody>
       </p:sp>
@@ -4642,19 +5469,8 @@
                 <a:latin typeface="Times New Roman" panose="02020603050405020304" pitchFamily="18" charset="0"/>
                 <a:cs typeface="Times New Roman" panose="02020603050405020304" pitchFamily="18" charset="0"/>
               </a:rPr>
-              <a:t>Várjuk </a:t>
-            </a:r>
-            <a:r>
-              <a:rPr lang="hu-HU">
-                <a:latin typeface="Times New Roman" panose="02020603050405020304" pitchFamily="18" charset="0"/>
-                <a:cs typeface="Times New Roman" panose="02020603050405020304" pitchFamily="18" charset="0"/>
-              </a:rPr>
-              <a:t>a kérdéseket</a:t>
-            </a:r>
-            <a:endParaRPr lang="hu-HU" dirty="0">
-              <a:latin typeface="Times New Roman" panose="02020603050405020304" pitchFamily="18" charset="0"/>
-              <a:cs typeface="Times New Roman" panose="02020603050405020304" pitchFamily="18" charset="0"/>
-            </a:endParaRPr>
+              <a:t>Várjuk a kérdéseket!</a:t>
+            </a:r>
           </a:p>
         </p:txBody>
       </p:sp>
@@ -4773,35 +5589,97 @@
         </p:nvSpPr>
         <p:spPr/>
         <p:txBody>
-          <a:bodyPr/>
+          <a:bodyPr vert="horz" lIns="0" tIns="45720" rIns="0" bIns="45720" rtlCol="0" anchor="t">
+            <a:normAutofit/>
+          </a:bodyPr>
           <a:lstStyle/>
           <a:p>
-            <a:pPr marL="201168" lvl="1" indent="0">
+            <a:pPr marL="200660" lvl="1" indent="0">
               <a:buNone/>
             </a:pPr>
             <a:r>
-              <a:rPr lang="hu-HU" dirty="0">
-                <a:latin typeface="Times New Roman" panose="02020603050405020304" pitchFamily="18" charset="0"/>
-                <a:cs typeface="Times New Roman" panose="02020603050405020304" pitchFamily="18" charset="0"/>
+              <a:rPr lang="hu-HU" sz="2000" dirty="0">
+                <a:solidFill>
+                  <a:srgbClr val="404040"/>
+                </a:solidFill>
+                <a:latin typeface="Times New Roman"/>
+                <a:ea typeface="+mn-lt"/>
+                <a:cs typeface="Times New Roman"/>
               </a:rPr>
               <a:t>Probléma:</a:t>
             </a:r>
-          </a:p>
-          <a:p>
-            <a:pPr lvl="1"/>
-            <a:r>
-              <a:rPr lang="hu-HU" dirty="0">
-                <a:latin typeface="Times New Roman" panose="02020603050405020304" pitchFamily="18" charset="0"/>
-                <a:cs typeface="Times New Roman" panose="02020603050405020304" pitchFamily="18" charset="0"/>
+            <a:endParaRPr lang="hu-HU" sz="2000" dirty="0">
+              <a:solidFill>
+                <a:srgbClr val="404040"/>
+              </a:solidFill>
+              <a:latin typeface="Times New Roman"/>
+              <a:cs typeface="Times New Roman"/>
+            </a:endParaRPr>
+          </a:p>
+          <a:p>
+            <a:pPr marL="383540" lvl="1"/>
+            <a:r>
+              <a:rPr lang="hu-HU" sz="2000">
+                <a:solidFill>
+                  <a:srgbClr val="404040"/>
+                </a:solidFill>
+                <a:latin typeface="Times New Roman"/>
+                <a:ea typeface="+mn-lt"/>
+                <a:cs typeface="Times New Roman"/>
               </a:rPr>
-              <a:t>A kisebb könyvtárak, könyvesboltok és multimédiaboltok digitális elérésének hiánya.</a:t>
-            </a:r>
-          </a:p>
-          <a:p>
-            <a:pPr marL="201168" lvl="1" indent="0">
+              <a:t>A kisebb könyvtárak és multimédiaboltok nem rendelkeznek digitális infrastruktúrával → nincs online hozzáférés a kínálathoz és kölcsönzéshez.</a:t>
+            </a:r>
+          </a:p>
+          <a:p>
+            <a:pPr marL="200660" lvl="1" indent="0">
               <a:buNone/>
             </a:pPr>
-            <a:endParaRPr lang="hu-HU" dirty="0"/>
+            <a:r>
+              <a:rPr lang="hu-HU" sz="2000">
+                <a:solidFill>
+                  <a:srgbClr val="404040"/>
+                </a:solidFill>
+                <a:latin typeface="Times New Roman"/>
+                <a:ea typeface="+mn-lt"/>
+                <a:cs typeface="Times New Roman"/>
+              </a:rPr>
+              <a:t>Megoldás:</a:t>
+            </a:r>
+            <a:endParaRPr lang="hu-HU" sz="2000">
+              <a:solidFill>
+                <a:srgbClr val="404040"/>
+              </a:solidFill>
+              <a:latin typeface="Times New Roman"/>
+              <a:cs typeface="Times New Roman"/>
+            </a:endParaRPr>
+          </a:p>
+          <a:p>
+            <a:pPr marL="486410" lvl="1" indent="-285750"/>
+            <a:r>
+              <a:rPr lang="hu-HU" sz="2000">
+                <a:solidFill>
+                  <a:srgbClr val="404040"/>
+                </a:solidFill>
+                <a:latin typeface="Times New Roman"/>
+                <a:ea typeface="+mn-lt"/>
+                <a:cs typeface="Times New Roman"/>
+              </a:rPr>
+              <a:t>Modern webalkalmazás könyvek és filmek nyilvántartására, valamint kölcsönzések online kezelésére üzemeltetők és felhasználók számára egyaránt.</a:t>
+            </a:r>
+            <a:endParaRPr lang="hu-HU" sz="2000">
+              <a:latin typeface="Times New Roman"/>
+              <a:cs typeface="Times New Roman"/>
+            </a:endParaRPr>
+          </a:p>
+          <a:p>
+            <a:pPr marL="200660" lvl="1" indent="0">
+              <a:buNone/>
+            </a:pPr>
+            <a:endParaRPr lang="hu-HU" dirty="0">
+              <a:latin typeface="Calibri"/>
+              <a:ea typeface="Calibri"/>
+              <a:cs typeface="Calibri"/>
+            </a:endParaRPr>
           </a:p>
         </p:txBody>
       </p:sp>
@@ -4915,62 +5793,172 @@
             <a:spLocks noGrp="1"/>
           </p:cNvSpPr>
           <p:nvPr>
-            <p:ph idx="1"/>
+            <p:ph sz="half" idx="1"/>
           </p:nvPr>
         </p:nvSpPr>
         <p:spPr/>
         <p:txBody>
-          <a:bodyPr/>
+          <a:bodyPr vert="horz" lIns="0" tIns="45720" rIns="0" bIns="45720" rtlCol="0" anchor="t">
+            <a:normAutofit/>
+          </a:bodyPr>
           <a:lstStyle/>
           <a:p>
             <a:r>
-              <a:rPr lang="hu-HU">
-                <a:latin typeface="Times New Roman" panose="02020603050405020304" pitchFamily="18" charset="0"/>
-                <a:cs typeface="Times New Roman" panose="02020603050405020304" pitchFamily="18" charset="0"/>
+              <a:rPr lang="hu-HU" sz="2400">
+                <a:latin typeface="Times New Roman"/>
+                <a:cs typeface="Times New Roman"/>
               </a:rPr>
-              <a:t>Frontend: Lóránt Márton</a:t>
-            </a:r>
-          </a:p>
-          <a:p>
-            <a:r>
-              <a:rPr lang="hu-HU">
-                <a:latin typeface="Times New Roman" panose="02020603050405020304" pitchFamily="18" charset="0"/>
-                <a:cs typeface="Times New Roman" panose="02020603050405020304" pitchFamily="18" charset="0"/>
+              <a:t>Lóránt Márton</a:t>
+            </a:r>
+          </a:p>
+          <a:p>
+            <a:pPr marL="383540" lvl="1"/>
+            <a:r>
+              <a:rPr lang="hu-HU" sz="2000">
+                <a:latin typeface="Times New Roman"/>
+                <a:cs typeface="Times New Roman"/>
               </a:rPr>
-              <a:t>Backend, adatbázis: Kovács Kristóf</a:t>
-            </a:r>
-          </a:p>
-          <a:p>
-            <a:r>
-              <a:rPr lang="hu-HU">
-                <a:latin typeface="Times New Roman" panose="02020603050405020304" pitchFamily="18" charset="0"/>
-                <a:cs typeface="Times New Roman" panose="02020603050405020304" pitchFamily="18" charset="0"/>
+              <a:t>UI és UX</a:t>
+            </a:r>
+          </a:p>
+          <a:p>
+            <a:pPr marL="383540" lvl="1"/>
+            <a:r>
+              <a:rPr lang="hu-HU" sz="2000">
+                <a:latin typeface="Times New Roman"/>
+                <a:cs typeface="Times New Roman"/>
               </a:rPr>
-              <a:t>Tesztelés:</a:t>
-            </a:r>
-          </a:p>
-          <a:p>
-            <a:pPr lvl="1"/>
-            <a:r>
-              <a:rPr lang="hu-HU">
-                <a:latin typeface="Times New Roman" panose="02020603050405020304" pitchFamily="18" charset="0"/>
-                <a:cs typeface="Times New Roman" panose="02020603050405020304" pitchFamily="18" charset="0"/>
+              <a:t>Frontend tervezés és megvalósítás</a:t>
+            </a:r>
+          </a:p>
+          <a:p>
+            <a:pPr marL="383540" lvl="1"/>
+            <a:r>
+              <a:rPr lang="hu-HU" sz="2000">
+                <a:latin typeface="Times New Roman"/>
+                <a:cs typeface="Times New Roman"/>
               </a:rPr>
-              <a:t>Frontend: Lóránt Márton</a:t>
-            </a:r>
-          </a:p>
-          <a:p>
-            <a:pPr lvl="1"/>
-            <a:r>
-              <a:rPr lang="hu-HU">
-                <a:latin typeface="Times New Roman" panose="02020603050405020304" pitchFamily="18" charset="0"/>
-                <a:cs typeface="Times New Roman" panose="02020603050405020304" pitchFamily="18" charset="0"/>
+              <a:t>EmailJS</a:t>
+            </a:r>
+          </a:p>
+          <a:p>
+            <a:pPr marL="383540" lvl="1"/>
+            <a:r>
+              <a:rPr lang="hu-HU" sz="2000">
+                <a:latin typeface="Times New Roman"/>
+                <a:cs typeface="Times New Roman"/>
               </a:rPr>
-              <a:t>Backend: Kovács Kristóf</a:t>
-            </a:r>
-            <a:endParaRPr lang="hu-HU" dirty="0">
-              <a:latin typeface="Times New Roman" panose="02020603050405020304" pitchFamily="18" charset="0"/>
-              <a:cs typeface="Times New Roman" panose="02020603050405020304" pitchFamily="18" charset="0"/>
+              <a:t>Frontend tesztelés</a:t>
+            </a:r>
+          </a:p>
+          <a:p>
+            <a:pPr marL="383540" lvl="1"/>
+            <a:endParaRPr lang="hu-HU" sz="2200" dirty="0">
+              <a:latin typeface="Times New Roman"/>
+              <a:cs typeface="Times New Roman"/>
+            </a:endParaRPr>
+          </a:p>
+          <a:p>
+            <a:pPr marL="383540" lvl="1"/>
+            <a:endParaRPr lang="hu-HU" sz="2000" dirty="0">
+              <a:latin typeface="Times New Roman"/>
+              <a:cs typeface="Times New Roman"/>
+            </a:endParaRPr>
+          </a:p>
+        </p:txBody>
+      </p:sp>
+      <p:sp>
+        <p:nvSpPr>
+          <p:cNvPr id="4" name="Tartalom helye 3">
+            <a:extLst>
+              <a:ext uri="{FF2B5EF4-FFF2-40B4-BE49-F238E27FC236}">
+                <a16:creationId xmlns:a16="http://schemas.microsoft.com/office/drawing/2014/main" id="{9C78F864-F66C-098D-FEE8-C68AF30F1AD5}"/>
+              </a:ext>
+            </a:extLst>
+          </p:cNvPr>
+          <p:cNvSpPr>
+            <a:spLocks noGrp="1"/>
+          </p:cNvSpPr>
+          <p:nvPr>
+            <p:ph sz="half" idx="2"/>
+          </p:nvPr>
+        </p:nvSpPr>
+        <p:spPr/>
+        <p:txBody>
+          <a:bodyPr vert="horz" lIns="0" tIns="45720" rIns="0" bIns="45720" rtlCol="0" anchor="t">
+            <a:normAutofit/>
+          </a:bodyPr>
+          <a:lstStyle/>
+          <a:p>
+            <a:r>
+              <a:rPr lang="hu-HU" sz="2400">
+                <a:latin typeface="Times New Roman"/>
+                <a:cs typeface="Times New Roman"/>
+              </a:rPr>
+              <a:t>Kovács Kristóf</a:t>
+            </a:r>
+            <a:endParaRPr lang="hu-HU" sz="2400">
+              <a:solidFill>
+                <a:srgbClr val="000000"/>
+              </a:solidFill>
+              <a:latin typeface="Times New Roman"/>
+              <a:cs typeface="Times New Roman"/>
+            </a:endParaRPr>
+          </a:p>
+          <a:p>
+            <a:pPr marL="383540" lvl="1">
+              <a:buFont typeface="Courier New" panose="020F0502020204030204" pitchFamily="34" charset="0"/>
+              <a:buChar char="o"/>
+            </a:pPr>
+            <a:r>
+              <a:rPr lang="hu-HU" sz="2000">
+                <a:ea typeface="Calibri"/>
+                <a:cs typeface="Calibri"/>
+              </a:rPr>
+              <a:t>Rest API megvalósítása</a:t>
+            </a:r>
+          </a:p>
+          <a:p>
+            <a:pPr marL="383540" lvl="1">
+              <a:buFont typeface="Courier New" panose="020F0502020204030204" pitchFamily="34" charset="0"/>
+              <a:buChar char="o"/>
+            </a:pPr>
+            <a:r>
+              <a:rPr lang="hu-HU" sz="2000">
+                <a:ea typeface="Calibri"/>
+                <a:cs typeface="Calibri"/>
+              </a:rPr>
+              <a:t>Backend fejlesztés</a:t>
+            </a:r>
+          </a:p>
+          <a:p>
+            <a:pPr marL="383540" lvl="1">
+              <a:buFont typeface="Courier New" panose="020F0502020204030204" pitchFamily="34" charset="0"/>
+              <a:buChar char="o"/>
+            </a:pPr>
+            <a:r>
+              <a:rPr lang="hu-HU" sz="2000">
+                <a:ea typeface="Calibri"/>
+                <a:cs typeface="Calibri"/>
+              </a:rPr>
+              <a:t>Adatbázis tervezés és megvalósítás</a:t>
+            </a:r>
+          </a:p>
+          <a:p>
+            <a:pPr marL="383540" lvl="1">
+              <a:buFont typeface="Courier New" panose="020F0502020204030204" pitchFamily="34" charset="0"/>
+              <a:buChar char="o"/>
+            </a:pPr>
+            <a:r>
+              <a:rPr lang="hu-HU" sz="2000">
+                <a:ea typeface="Calibri"/>
+                <a:cs typeface="Calibri"/>
+              </a:rPr>
+              <a:t>Backend tesztelés</a:t>
+            </a:r>
+            <a:endParaRPr lang="hu-HU" sz="2000" dirty="0">
+              <a:ea typeface="Calibri"/>
+              <a:cs typeface="Calibri"/>
             </a:endParaRPr>
           </a:p>
         </p:txBody>
@@ -5023,6 +6011,14 @@
 <file path=ppt/slides/slide4.xml><?xml version="1.0" encoding="utf-8"?>
 <p:sld xmlns:a="http://schemas.openxmlformats.org/drawingml/2006/main" xmlns:r="http://schemas.openxmlformats.org/officeDocument/2006/relationships" xmlns:p="http://schemas.openxmlformats.org/presentationml/2006/main">
   <p:cSld>
+    <p:bg>
+      <p:bgPr>
+        <a:solidFill>
+          <a:schemeClr val="bg1"/>
+        </a:solidFill>
+        <a:effectLst/>
+      </p:bgPr>
+    </p:bg>
     <p:spTree>
       <p:nvGrpSpPr>
         <p:cNvPr id="1" name=""/>
@@ -5053,9 +6049,16 @@
             <p:ph type="title"/>
           </p:nvPr>
         </p:nvSpPr>
-        <p:spPr/>
-        <p:txBody>
-          <a:bodyPr/>
+        <p:spPr>
+          <a:xfrm>
+            <a:off x="1097280" y="286603"/>
+            <a:ext cx="10058400" cy="1450757"/>
+          </a:xfrm>
+        </p:spPr>
+        <p:txBody>
+          <a:bodyPr>
+            <a:normAutofit/>
+          </a:bodyPr>
           <a:lstStyle/>
           <a:p>
             <a:r>
@@ -5072,6 +6075,72 @@
           </a:p>
         </p:txBody>
       </p:sp>
+      <p:pic>
+        <p:nvPicPr>
+          <p:cNvPr id="5" name="Kép 4" descr="EmailJS">
+            <a:extLst>
+              <a:ext uri="{FF2B5EF4-FFF2-40B4-BE49-F238E27FC236}">
+                <a16:creationId xmlns:a16="http://schemas.microsoft.com/office/drawing/2014/main" id="{DD1B3D79-BD53-65CB-E83B-6498BE330435}"/>
+              </a:ext>
+            </a:extLst>
+          </p:cNvPr>
+          <p:cNvPicPr>
+            <a:picLocks noChangeAspect="1"/>
+          </p:cNvPicPr>
+          <p:nvPr/>
+        </p:nvPicPr>
+        <p:blipFill>
+          <a:blip r:embed="rId2"/>
+          <a:stretch>
+            <a:fillRect/>
+          </a:stretch>
+        </p:blipFill>
+        <p:spPr>
+          <a:xfrm>
+            <a:off x="1183017" y="2463795"/>
+            <a:ext cx="2376058" cy="2376058"/>
+          </a:xfrm>
+          <a:prstGeom prst="rect">
+            <a:avLst/>
+          </a:prstGeom>
+        </p:spPr>
+      </p:pic>
+      <p:pic>
+        <p:nvPicPr>
+          <p:cNvPr id="4" name="Ábra 3" descr="React.js development services | NeuroSYS">
+            <a:extLst>
+              <a:ext uri="{FF2B5EF4-FFF2-40B4-BE49-F238E27FC236}">
+                <a16:creationId xmlns:a16="http://schemas.microsoft.com/office/drawing/2014/main" id="{1ED3EBE8-C6FC-E4AF-F3DE-A63831DFE861}"/>
+              </a:ext>
+            </a:extLst>
+          </p:cNvPr>
+          <p:cNvPicPr>
+            <a:picLocks noChangeAspect="1"/>
+          </p:cNvPicPr>
+          <p:nvPr/>
+        </p:nvPicPr>
+        <p:blipFill>
+          <a:blip>
+            <a:extLst>
+              <a:ext uri="{96DAC541-7B7A-43D3-8B79-37D633B846F1}">
+                <asvg:svgBlip xmlns:asvg="http://schemas.microsoft.com/office/drawing/2016/SVG/main" r:embed="rId3"/>
+              </a:ext>
+            </a:extLst>
+          </a:blip>
+          <a:stretch>
+            <a:fillRect/>
+          </a:stretch>
+        </p:blipFill>
+        <p:spPr>
+          <a:xfrm>
+            <a:off x="3719942" y="2246714"/>
+            <a:ext cx="2376057" cy="2810220"/>
+          </a:xfrm>
+          <a:prstGeom prst="rect">
+            <a:avLst/>
+          </a:prstGeom>
+        </p:spPr>
+      </p:pic>
       <p:sp>
         <p:nvSpPr>
           <p:cNvPr id="3" name="Tartalom helye 2">
@@ -5088,115 +6157,117 @@
             <p:ph idx="1"/>
           </p:nvPr>
         </p:nvSpPr>
-        <p:spPr/>
-        <p:txBody>
-          <a:bodyPr/>
+        <p:spPr>
+          <a:xfrm>
+            <a:off x="6351639" y="1845734"/>
+            <a:ext cx="4804041" cy="4023360"/>
+          </a:xfrm>
+        </p:spPr>
+        <p:txBody>
+          <a:bodyPr vert="horz" lIns="0" tIns="45720" rIns="0" bIns="45720" rtlCol="0" anchor="t">
+            <a:normAutofit/>
+          </a:bodyPr>
           <a:lstStyle/>
           <a:p>
             <a:r>
-              <a:rPr lang="hu-HU" dirty="0">
-                <a:latin typeface="Times New Roman" panose="02020603050405020304" pitchFamily="18" charset="0"/>
-                <a:cs typeface="Times New Roman" panose="02020603050405020304" pitchFamily="18" charset="0"/>
+              <a:rPr lang="hu-HU" sz="2400" dirty="0">
+                <a:latin typeface="Times New Roman"/>
+                <a:cs typeface="Times New Roman"/>
               </a:rPr>
               <a:t>Technológia </a:t>
             </a:r>
             <a:r>
-              <a:rPr lang="hu-HU" dirty="0" err="1">
-                <a:latin typeface="Times New Roman" panose="02020603050405020304" pitchFamily="18" charset="0"/>
-                <a:cs typeface="Times New Roman" panose="02020603050405020304" pitchFamily="18" charset="0"/>
+              <a:rPr lang="hu-HU" sz="2400" err="1">
+                <a:latin typeface="Times New Roman"/>
+                <a:cs typeface="Times New Roman"/>
               </a:rPr>
               <a:t>stack</a:t>
             </a:r>
             <a:r>
-              <a:rPr lang="hu-HU" dirty="0">
-                <a:latin typeface="Times New Roman" panose="02020603050405020304" pitchFamily="18" charset="0"/>
-                <a:cs typeface="Times New Roman" panose="02020603050405020304" pitchFamily="18" charset="0"/>
+              <a:rPr lang="hu-HU" sz="2400" dirty="0">
+                <a:latin typeface="Times New Roman"/>
+                <a:cs typeface="Times New Roman"/>
               </a:rPr>
               <a:t>: React.js, </a:t>
             </a:r>
             <a:r>
-              <a:rPr lang="hu-HU" dirty="0" err="1">
-                <a:latin typeface="Times New Roman" panose="02020603050405020304" pitchFamily="18" charset="0"/>
-                <a:cs typeface="Times New Roman" panose="02020603050405020304" pitchFamily="18" charset="0"/>
+              <a:rPr lang="hu-HU" sz="2400" err="1">
+                <a:latin typeface="Times New Roman"/>
+                <a:cs typeface="Times New Roman"/>
               </a:rPr>
               <a:t>Vite</a:t>
             </a:r>
             <a:r>
-              <a:rPr lang="hu-HU" dirty="0">
-                <a:latin typeface="Times New Roman" panose="02020603050405020304" pitchFamily="18" charset="0"/>
-                <a:cs typeface="Times New Roman" panose="02020603050405020304" pitchFamily="18" charset="0"/>
+              <a:rPr lang="hu-HU" sz="2400" dirty="0">
+                <a:latin typeface="Times New Roman"/>
+                <a:cs typeface="Times New Roman"/>
               </a:rPr>
               <a:t>, CSS, JavaScript, </a:t>
             </a:r>
             <a:r>
-              <a:rPr lang="hu-HU" dirty="0" err="1">
-                <a:latin typeface="Times New Roman" panose="02020603050405020304" pitchFamily="18" charset="0"/>
-                <a:cs typeface="Times New Roman" panose="02020603050405020304" pitchFamily="18" charset="0"/>
+              <a:rPr lang="hu-HU" sz="2400" err="1">
+                <a:latin typeface="Times New Roman"/>
+                <a:cs typeface="Times New Roman"/>
               </a:rPr>
               <a:t>Cypress</a:t>
             </a:r>
             <a:r>
-              <a:rPr lang="hu-HU" dirty="0">
-                <a:latin typeface="Times New Roman" panose="02020603050405020304" pitchFamily="18" charset="0"/>
-                <a:cs typeface="Times New Roman" panose="02020603050405020304" pitchFamily="18" charset="0"/>
+              <a:rPr lang="hu-HU" sz="2400" dirty="0">
+                <a:latin typeface="Times New Roman"/>
+                <a:cs typeface="Times New Roman"/>
               </a:rPr>
               <a:t>, </a:t>
             </a:r>
             <a:r>
-              <a:rPr lang="hu-HU" dirty="0" err="1">
-                <a:latin typeface="Times New Roman" panose="02020603050405020304" pitchFamily="18" charset="0"/>
-                <a:cs typeface="Times New Roman" panose="02020603050405020304" pitchFamily="18" charset="0"/>
+              <a:rPr lang="hu-HU" sz="2400" err="1">
+                <a:latin typeface="Times New Roman"/>
+                <a:cs typeface="Times New Roman"/>
               </a:rPr>
               <a:t>Jest</a:t>
             </a:r>
-            <a:r>
-              <a:rPr lang="hu-HU" dirty="0">
-                <a:latin typeface="Times New Roman" panose="02020603050405020304" pitchFamily="18" charset="0"/>
-                <a:cs typeface="Times New Roman" panose="02020603050405020304" pitchFamily="18" charset="0"/>
-              </a:rPr>
-              <a:t>, Docker, </a:t>
-            </a:r>
-            <a:r>
-              <a:rPr lang="hu-HU" dirty="0" err="1">
-                <a:latin typeface="Times New Roman" panose="02020603050405020304" pitchFamily="18" charset="0"/>
-                <a:cs typeface="Times New Roman" panose="02020603050405020304" pitchFamily="18" charset="0"/>
-              </a:rPr>
-              <a:t>Typescript</a:t>
-            </a:r>
-            <a:endParaRPr lang="hu-HU" dirty="0">
-              <a:latin typeface="Times New Roman" panose="02020603050405020304" pitchFamily="18" charset="0"/>
-              <a:cs typeface="Times New Roman" panose="02020603050405020304" pitchFamily="18" charset="0"/>
+            <a:endParaRPr lang="hu-HU" sz="2400" dirty="0">
+              <a:latin typeface="Times New Roman"/>
+              <a:cs typeface="Times New Roman"/>
             </a:endParaRPr>
           </a:p>
           <a:p>
             <a:r>
-              <a:rPr lang="hu-HU" dirty="0" err="1">
-                <a:latin typeface="Times New Roman" panose="02020603050405020304" pitchFamily="18" charset="0"/>
-                <a:cs typeface="Times New Roman" panose="02020603050405020304" pitchFamily="18" charset="0"/>
+              <a:rPr lang="hu-HU" sz="2400" err="1">
+                <a:latin typeface="Times New Roman"/>
+                <a:cs typeface="Times New Roman"/>
               </a:rPr>
               <a:t>Libraries</a:t>
             </a:r>
             <a:r>
-              <a:rPr lang="hu-HU" dirty="0">
-                <a:latin typeface="Times New Roman" panose="02020603050405020304" pitchFamily="18" charset="0"/>
-                <a:cs typeface="Times New Roman" panose="02020603050405020304" pitchFamily="18" charset="0"/>
+              <a:rPr lang="hu-HU" sz="2400" dirty="0">
+                <a:latin typeface="Times New Roman"/>
+                <a:cs typeface="Times New Roman"/>
               </a:rPr>
               <a:t>: </a:t>
             </a:r>
             <a:r>
-              <a:rPr lang="hu-HU" dirty="0" err="1">
-                <a:latin typeface="Times New Roman" panose="02020603050405020304" pitchFamily="18" charset="0"/>
-                <a:cs typeface="Times New Roman" panose="02020603050405020304" pitchFamily="18" charset="0"/>
+              <a:rPr lang="hu-HU" sz="2400" err="1">
+                <a:latin typeface="Times New Roman"/>
+                <a:cs typeface="Times New Roman"/>
               </a:rPr>
               <a:t>EmailJS</a:t>
             </a:r>
             <a:r>
-              <a:rPr lang="hu-HU" dirty="0">
-                <a:latin typeface="Times New Roman" panose="02020603050405020304" pitchFamily="18" charset="0"/>
-                <a:cs typeface="Times New Roman" panose="02020603050405020304" pitchFamily="18" charset="0"/>
+              <a:rPr lang="hu-HU" sz="2400" dirty="0">
+                <a:latin typeface="Times New Roman"/>
+                <a:cs typeface="Times New Roman"/>
               </a:rPr>
               <a:t>, Chart.JS</a:t>
             </a:r>
+          </a:p>
+          <a:p>
+            <a:pPr marL="0" indent="0">
+              <a:buNone/>
+            </a:pPr>
+            <a:endParaRPr lang="hu-HU" dirty="0">
+              <a:latin typeface="Times New Roman"/>
+              <a:cs typeface="Times New Roman"/>
+            </a:endParaRPr>
           </a:p>
           <a:p>
             <a:pPr marL="0" indent="0">
@@ -5228,17 +6299,34 @@
             <p:ph type="sldNum" sz="quarter" idx="12"/>
           </p:nvPr>
         </p:nvSpPr>
-        <p:spPr/>
-        <p:txBody>
-          <a:bodyPr/>
+        <p:spPr>
+          <a:xfrm>
+            <a:off x="9900458" y="6459785"/>
+            <a:ext cx="1312025" cy="365125"/>
+          </a:xfrm>
+        </p:spPr>
+        <p:txBody>
+          <a:bodyPr>
+            <a:normAutofit/>
+          </a:bodyPr>
           <a:lstStyle/>
           <a:p>
+            <a:pPr>
+              <a:spcAft>
+                <a:spcPts val="600"/>
+              </a:spcAft>
+            </a:pPr>
             <a:fld id="{5444FD88-FB79-4B01-A96D-DDA513F5DE89}" type="slidenum">
-              <a:rPr lang="hu-HU" sz="2000" smtClean="0"/>
+              <a:rPr lang="hu-HU" smtClean="0"/>
+              <a:pPr>
+                <a:spcAft>
+                  <a:spcPts val="600"/>
+                </a:spcAft>
+              </a:pPr>
               <a:t>4</a:t>
             </a:fld>
             <a:r>
-              <a:rPr lang="hu-HU" sz="2000" dirty="0"/>
+              <a:rPr lang="hu-HU"/>
               <a:t>/11</a:t>
             </a:r>
           </a:p>
@@ -5290,7 +6378,12 @@
             <p:ph type="title"/>
           </p:nvPr>
         </p:nvSpPr>
-        <p:spPr/>
+        <p:spPr>
+          <a:xfrm>
+            <a:off x="1036320" y="286603"/>
+            <a:ext cx="10119360" cy="739557"/>
+          </a:xfrm>
+        </p:spPr>
         <p:txBody>
           <a:bodyPr/>
           <a:lstStyle/>
@@ -5343,10 +6436,10 @@
       </p:sp>
       <p:pic>
         <p:nvPicPr>
-          <p:cNvPr id="4" name="Tartalom helye 4">
+          <p:cNvPr id="3" name="Tartalom helye 2" descr="A képen szöveg, képernyőkép, diagram, Párhuzamos látható&#10;&#10;Lehet, hogy az AI által létrehozott tartalom helytelen.">
             <a:extLst>
               <a:ext uri="{FF2B5EF4-FFF2-40B4-BE49-F238E27FC236}">
-                <a16:creationId xmlns:a16="http://schemas.microsoft.com/office/drawing/2014/main" id="{4DCC093D-93FA-252E-CFF6-7E74201B811B}"/>
+                <a16:creationId xmlns:a16="http://schemas.microsoft.com/office/drawing/2014/main" id="{35667589-7A36-6F4D-BC00-5AEF8C2563CF}"/>
               </a:ext>
             </a:extLst>
           </p:cNvPr>
@@ -5358,21 +6451,15 @@
           </p:nvPr>
         </p:nvPicPr>
         <p:blipFill>
-          <a:blip r:embed="rId2">
-            <a:extLst>
-              <a:ext uri="{28A0092B-C50C-407E-A947-70E740481C1C}">
-                <a14:useLocalDpi xmlns:a14="http://schemas.microsoft.com/office/drawing/2010/main" val="0"/>
-              </a:ext>
-            </a:extLst>
-          </a:blip>
+          <a:blip r:embed="rId2"/>
           <a:stretch>
             <a:fillRect/>
           </a:stretch>
         </p:blipFill>
         <p:spPr>
           <a:xfrm>
-            <a:off x="1097280" y="1920239"/>
-            <a:ext cx="6977058" cy="4022725"/>
+            <a:off x="9116683" y="1032934"/>
+            <a:ext cx="2625114" cy="5232400"/>
           </a:xfrm>
           <a:prstGeom prst="rect">
             <a:avLst/>
@@ -5381,10 +6468,10 @@
       </p:pic>
       <p:pic>
         <p:nvPicPr>
-          <p:cNvPr id="5" name="Kép 4">
+          <p:cNvPr id="4" name="Kép 3" descr="A képen diagram, sor, minta látható&#10;&#10;Lehet, hogy az AI által létrehozott tartalom helytelen.">
             <a:extLst>
               <a:ext uri="{FF2B5EF4-FFF2-40B4-BE49-F238E27FC236}">
-                <a16:creationId xmlns:a16="http://schemas.microsoft.com/office/drawing/2014/main" id="{87EA4736-C0BC-0BD7-C362-264F39BBA98F}"/>
+                <a16:creationId xmlns:a16="http://schemas.microsoft.com/office/drawing/2014/main" id="{2C2C50BA-5FC1-5EC6-FBD4-FFB14F81F2BB}"/>
               </a:ext>
             </a:extLst>
           </p:cNvPr>
@@ -5394,21 +6481,15 @@
           <p:nvPr/>
         </p:nvPicPr>
         <p:blipFill>
-          <a:blip r:embed="rId3">
-            <a:extLst>
-              <a:ext uri="{28A0092B-C50C-407E-A947-70E740481C1C}">
-                <a14:useLocalDpi xmlns:a14="http://schemas.microsoft.com/office/drawing/2010/main" val="0"/>
-              </a:ext>
-            </a:extLst>
-          </a:blip>
+          <a:blip r:embed="rId3"/>
           <a:stretch>
             <a:fillRect/>
           </a:stretch>
         </p:blipFill>
         <p:spPr>
           <a:xfrm>
-            <a:off x="8660765" y="568959"/>
-            <a:ext cx="2826763" cy="5556885"/>
+            <a:off x="219075" y="1030605"/>
+            <a:ext cx="8909050" cy="5416550"/>
           </a:xfrm>
           <a:prstGeom prst="rect">
             <a:avLst/>
@@ -5431,6 +6512,14 @@
 <file path=ppt/slides/slide6.xml><?xml version="1.0" encoding="utf-8"?>
 <p:sld xmlns:a="http://schemas.openxmlformats.org/drawingml/2006/main" xmlns:r="http://schemas.openxmlformats.org/officeDocument/2006/relationships" xmlns:p="http://schemas.openxmlformats.org/presentationml/2006/main">
   <p:cSld>
+    <p:bg>
+      <p:bgPr>
+        <a:solidFill>
+          <a:schemeClr val="bg1"/>
+        </a:solidFill>
+        <a:effectLst/>
+      </p:bgPr>
+    </p:bg>
     <p:spTree>
       <p:nvGrpSpPr>
         <p:cNvPr id="1" name=""/>
@@ -5445,6 +6534,66 @@
           <a:chExt cx="0" cy="0"/>
         </a:xfrm>
       </p:grpSpPr>
+      <p:sp useBgFill="1">
+        <p:nvSpPr>
+          <p:cNvPr id="48" name="Rectangle 30">
+            <a:extLst>
+              <a:ext uri="{FF2B5EF4-FFF2-40B4-BE49-F238E27FC236}">
+                <a16:creationId xmlns:a16="http://schemas.microsoft.com/office/drawing/2014/main" id="{BA8475A3-3952-408D-8E93-626076E6D360}"/>
+              </a:ext>
+              <a:ext uri="{C183D7F6-B498-43B3-948B-1728B52AA6E4}">
+                <adec:decorative xmlns:adec="http://schemas.microsoft.com/office/drawing/2017/decorative" val="1"/>
+              </a:ext>
+            </a:extLst>
+          </p:cNvPr>
+          <p:cNvSpPr>
+            <a:spLocks noGrp="1" noRot="1" noChangeAspect="1" noMove="1" noResize="1" noEditPoints="1" noAdjustHandles="1" noChangeArrowheads="1" noChangeShapeType="1" noTextEdit="1"/>
+          </p:cNvSpPr>
+          <p:nvPr>
+            <p:extLst>
+              <p:ext uri="{386F3935-93C4-4BCD-93E2-E3B085C9AB24}">
+                <p16:designElem xmlns:p16="http://schemas.microsoft.com/office/powerpoint/2015/main" val="1"/>
+              </p:ext>
+            </p:extLst>
+          </p:nvPr>
+        </p:nvSpPr>
+        <p:spPr>
+          <a:xfrm>
+            <a:off x="0" y="0"/>
+            <a:ext cx="12192001" cy="6334316"/>
+          </a:xfrm>
+          <a:prstGeom prst="rect">
+            <a:avLst/>
+          </a:prstGeom>
+          <a:ln>
+            <a:noFill/>
+          </a:ln>
+        </p:spPr>
+        <p:style>
+          <a:lnRef idx="2">
+            <a:schemeClr val="accent1">
+              <a:shade val="50000"/>
+            </a:schemeClr>
+          </a:lnRef>
+          <a:fillRef idx="1">
+            <a:schemeClr val="accent1"/>
+          </a:fillRef>
+          <a:effectRef idx="0">
+            <a:schemeClr val="accent1"/>
+          </a:effectRef>
+          <a:fontRef idx="minor">
+            <a:schemeClr val="lt1"/>
+          </a:fontRef>
+        </p:style>
+        <p:txBody>
+          <a:bodyPr rtlCol="0" anchor="ctr"/>
+          <a:lstStyle/>
+          <a:p>
+            <a:pPr algn="ctr"/>
+            <a:endParaRPr lang="en-US"/>
+          </a:p>
+        </p:txBody>
+      </p:sp>
       <p:sp>
         <p:nvSpPr>
           <p:cNvPr id="2" name="Cím 1">
@@ -5461,9 +6610,16 @@
             <p:ph type="title"/>
           </p:nvPr>
         </p:nvSpPr>
-        <p:spPr/>
-        <p:txBody>
-          <a:bodyPr/>
+        <p:spPr>
+          <a:xfrm>
+            <a:off x="6956868" y="634946"/>
+            <a:ext cx="4592874" cy="1450757"/>
+          </a:xfrm>
+        </p:spPr>
+        <p:txBody>
+          <a:bodyPr>
+            <a:normAutofit/>
+          </a:bodyPr>
           <a:lstStyle/>
           <a:p>
             <a:r>
@@ -5480,6 +6636,501 @@
           </a:p>
         </p:txBody>
       </p:sp>
+      <p:sp>
+        <p:nvSpPr>
+          <p:cNvPr id="49" name="Rectangle 32">
+            <a:extLst>
+              <a:ext uri="{FF2B5EF4-FFF2-40B4-BE49-F238E27FC236}">
+                <a16:creationId xmlns:a16="http://schemas.microsoft.com/office/drawing/2014/main" id="{2D57056C-3580-48E4-9666-53A445F49042}"/>
+              </a:ext>
+              <a:ext uri="{C183D7F6-B498-43B3-948B-1728B52AA6E4}">
+                <adec:decorative xmlns:adec="http://schemas.microsoft.com/office/drawing/2017/decorative" val="1"/>
+              </a:ext>
+            </a:extLst>
+          </p:cNvPr>
+          <p:cNvSpPr>
+            <a:spLocks noGrp="1" noRot="1" noChangeAspect="1" noMove="1" noResize="1" noEditPoints="1" noAdjustHandles="1" noChangeArrowheads="1" noChangeShapeType="1" noTextEdit="1"/>
+          </p:cNvSpPr>
+          <p:nvPr>
+            <p:extLst>
+              <p:ext uri="{386F3935-93C4-4BCD-93E2-E3B085C9AB24}">
+                <p16:designElem xmlns:p16="http://schemas.microsoft.com/office/powerpoint/2015/main" val="1"/>
+              </p:ext>
+            </p:extLst>
+          </p:nvPr>
+        </p:nvSpPr>
+        <p:spPr>
+          <a:xfrm>
+            <a:off x="0" y="0"/>
+            <a:ext cx="6479458" cy="6334316"/>
+          </a:xfrm>
+          <a:prstGeom prst="rect">
+            <a:avLst/>
+          </a:prstGeom>
+          <a:solidFill>
+            <a:schemeClr val="bg2"/>
+          </a:solidFill>
+          <a:ln>
+            <a:noFill/>
+          </a:ln>
+        </p:spPr>
+        <p:style>
+          <a:lnRef idx="2">
+            <a:schemeClr val="accent1">
+              <a:shade val="50000"/>
+            </a:schemeClr>
+          </a:lnRef>
+          <a:fillRef idx="1">
+            <a:schemeClr val="accent1"/>
+          </a:fillRef>
+          <a:effectRef idx="0">
+            <a:schemeClr val="accent1"/>
+          </a:effectRef>
+          <a:fontRef idx="minor">
+            <a:schemeClr val="lt1"/>
+          </a:fontRef>
+        </p:style>
+        <p:txBody>
+          <a:bodyPr rtlCol="0" anchor="ctr"/>
+          <a:lstStyle/>
+          <a:p>
+            <a:pPr algn="ctr"/>
+            <a:endParaRPr lang="en-US"/>
+          </a:p>
+        </p:txBody>
+      </p:sp>
+      <p:sp>
+        <p:nvSpPr>
+          <p:cNvPr id="50" name="Rectangle 34">
+            <a:extLst>
+              <a:ext uri="{FF2B5EF4-FFF2-40B4-BE49-F238E27FC236}">
+                <a16:creationId xmlns:a16="http://schemas.microsoft.com/office/drawing/2014/main" id="{41C87A45-5863-4DAD-A1ED-9DD72EF1D020}"/>
+              </a:ext>
+              <a:ext uri="{C183D7F6-B498-43B3-948B-1728B52AA6E4}">
+                <adec:decorative xmlns:adec="http://schemas.microsoft.com/office/drawing/2017/decorative" val="1"/>
+              </a:ext>
+            </a:extLst>
+          </p:cNvPr>
+          <p:cNvSpPr>
+            <a:spLocks noGrp="1" noRot="1" noChangeAspect="1" noMove="1" noResize="1" noEditPoints="1" noAdjustHandles="1" noChangeArrowheads="1" noChangeShapeType="1" noTextEdit="1"/>
+          </p:cNvSpPr>
+          <p:nvPr>
+            <p:extLst>
+              <p:ext uri="{386F3935-93C4-4BCD-93E2-E3B085C9AB24}">
+                <p16:designElem xmlns:p16="http://schemas.microsoft.com/office/powerpoint/2015/main" val="1"/>
+              </p:ext>
+            </p:extLst>
+          </p:nvPr>
+        </p:nvSpPr>
+        <p:spPr>
+          <a:xfrm>
+            <a:off x="321733" y="321733"/>
+            <a:ext cx="3057906" cy="3408237"/>
+          </a:xfrm>
+          <a:prstGeom prst="rect">
+            <a:avLst/>
+          </a:prstGeom>
+          <a:solidFill>
+            <a:srgbClr val="FFFFFF"/>
+          </a:solidFill>
+          <a:ln w="63500">
+            <a:noFill/>
+            <a:miter lim="800000"/>
+          </a:ln>
+        </p:spPr>
+        <p:style>
+          <a:lnRef idx="2">
+            <a:schemeClr val="accent1">
+              <a:shade val="50000"/>
+            </a:schemeClr>
+          </a:lnRef>
+          <a:fillRef idx="1">
+            <a:schemeClr val="accent1"/>
+          </a:fillRef>
+          <a:effectRef idx="0">
+            <a:schemeClr val="accent1"/>
+          </a:effectRef>
+          <a:fontRef idx="minor">
+            <a:schemeClr val="lt1"/>
+          </a:fontRef>
+        </p:style>
+        <p:txBody>
+          <a:bodyPr rtlCol="0" anchor="ctr"/>
+          <a:lstStyle/>
+          <a:p>
+            <a:pPr algn="ctr"/>
+            <a:endParaRPr lang="en-US"/>
+          </a:p>
+        </p:txBody>
+      </p:sp>
+      <p:pic>
+        <p:nvPicPr>
+          <p:cNvPr id="4" name="Kép 3" descr="Discord – Letöltés és telepítés Windows rendszeren | Microsoft Store">
+            <a:extLst>
+              <a:ext uri="{FF2B5EF4-FFF2-40B4-BE49-F238E27FC236}">
+                <a16:creationId xmlns:a16="http://schemas.microsoft.com/office/drawing/2014/main" id="{E741150A-5829-71A7-7417-90BF5979770A}"/>
+              </a:ext>
+            </a:extLst>
+          </p:cNvPr>
+          <p:cNvPicPr>
+            <a:picLocks noChangeAspect="1"/>
+          </p:cNvPicPr>
+          <p:nvPr/>
+        </p:nvPicPr>
+        <p:blipFill>
+          <a:blip r:embed="rId2"/>
+          <a:stretch>
+            <a:fillRect/>
+          </a:stretch>
+        </p:blipFill>
+        <p:spPr>
+          <a:xfrm>
+            <a:off x="458336" y="633502"/>
+            <a:ext cx="2784700" cy="2784700"/>
+          </a:xfrm>
+          <a:prstGeom prst="rect">
+            <a:avLst/>
+          </a:prstGeom>
+        </p:spPr>
+      </p:pic>
+      <p:sp>
+        <p:nvSpPr>
+          <p:cNvPr id="51" name="Rectangle 36">
+            <a:extLst>
+              <a:ext uri="{FF2B5EF4-FFF2-40B4-BE49-F238E27FC236}">
+                <a16:creationId xmlns:a16="http://schemas.microsoft.com/office/drawing/2014/main" id="{0480D754-2EAA-46BD-A784-B04FC0A6F95D}"/>
+              </a:ext>
+              <a:ext uri="{C183D7F6-B498-43B3-948B-1728B52AA6E4}">
+                <adec:decorative xmlns:adec="http://schemas.microsoft.com/office/drawing/2017/decorative" val="1"/>
+              </a:ext>
+            </a:extLst>
+          </p:cNvPr>
+          <p:cNvSpPr>
+            <a:spLocks noGrp="1" noRot="1" noChangeAspect="1" noMove="1" noResize="1" noEditPoints="1" noAdjustHandles="1" noChangeArrowheads="1" noChangeShapeType="1" noTextEdit="1"/>
+          </p:cNvSpPr>
+          <p:nvPr>
+            <p:extLst>
+              <p:ext uri="{386F3935-93C4-4BCD-93E2-E3B085C9AB24}">
+                <p16:designElem xmlns:p16="http://schemas.microsoft.com/office/powerpoint/2015/main" val="1"/>
+              </p:ext>
+            </p:extLst>
+          </p:nvPr>
+        </p:nvSpPr>
+        <p:spPr>
+          <a:xfrm>
+            <a:off x="3528588" y="321733"/>
+            <a:ext cx="2567411" cy="1978453"/>
+          </a:xfrm>
+          <a:prstGeom prst="rect">
+            <a:avLst/>
+          </a:prstGeom>
+          <a:solidFill>
+            <a:srgbClr val="FFFFFF"/>
+          </a:solidFill>
+          <a:ln w="63500">
+            <a:noFill/>
+            <a:miter lim="800000"/>
+          </a:ln>
+        </p:spPr>
+        <p:style>
+          <a:lnRef idx="2">
+            <a:schemeClr val="accent1">
+              <a:shade val="50000"/>
+            </a:schemeClr>
+          </a:lnRef>
+          <a:fillRef idx="1">
+            <a:schemeClr val="accent1"/>
+          </a:fillRef>
+          <a:effectRef idx="0">
+            <a:schemeClr val="accent1"/>
+          </a:effectRef>
+          <a:fontRef idx="minor">
+            <a:schemeClr val="lt1"/>
+          </a:fontRef>
+        </p:style>
+        <p:txBody>
+          <a:bodyPr rtlCol="0" anchor="ctr"/>
+          <a:lstStyle/>
+          <a:p>
+            <a:pPr algn="ctr"/>
+            <a:endParaRPr lang="en-US"/>
+          </a:p>
+        </p:txBody>
+      </p:sp>
+      <p:pic>
+        <p:nvPicPr>
+          <p:cNvPr id="5" name="Kép 4" descr="Visual Studio Code logo landscape, tech companies, png | PNGEgg">
+            <a:extLst>
+              <a:ext uri="{FF2B5EF4-FFF2-40B4-BE49-F238E27FC236}">
+                <a16:creationId xmlns:a16="http://schemas.microsoft.com/office/drawing/2014/main" id="{D85355F7-8BC0-37A8-57C4-4D7A2D67E9C5}"/>
+              </a:ext>
+            </a:extLst>
+          </p:cNvPr>
+          <p:cNvPicPr>
+            <a:picLocks noChangeAspect="1"/>
+          </p:cNvPicPr>
+          <p:nvPr/>
+        </p:nvPicPr>
+        <p:blipFill>
+          <a:blip r:embed="rId3"/>
+          <a:stretch>
+            <a:fillRect/>
+          </a:stretch>
+        </p:blipFill>
+        <p:spPr>
+          <a:xfrm>
+            <a:off x="3987639" y="473902"/>
+            <a:ext cx="1670741" cy="1670741"/>
+          </a:xfrm>
+          <a:prstGeom prst="rect">
+            <a:avLst/>
+          </a:prstGeom>
+        </p:spPr>
+      </p:pic>
+      <p:cxnSp>
+        <p:nvCxnSpPr>
+          <p:cNvPr id="52" name="Straight Connector 38">
+            <a:extLst>
+              <a:ext uri="{FF2B5EF4-FFF2-40B4-BE49-F238E27FC236}">
+                <a16:creationId xmlns:a16="http://schemas.microsoft.com/office/drawing/2014/main" id="{CF099F8D-E727-44BC-9275-1EC5736F04C7}"/>
+              </a:ext>
+              <a:ext uri="{C183D7F6-B498-43B3-948B-1728B52AA6E4}">
+                <adec:decorative xmlns:adec="http://schemas.microsoft.com/office/drawing/2017/decorative" val="1"/>
+              </a:ext>
+            </a:extLst>
+          </p:cNvPr>
+          <p:cNvCxnSpPr>
+            <a:cxnSpLocks noGrp="1" noRot="1" noChangeAspect="1" noMove="1" noResize="1" noEditPoints="1" noAdjustHandles="1" noChangeArrowheads="1" noChangeShapeType="1"/>
+          </p:cNvCxnSpPr>
+          <p:nvPr>
+            <p:extLst>
+              <p:ext uri="{386F3935-93C4-4BCD-93E2-E3B085C9AB24}">
+                <p16:designElem xmlns:p16="http://schemas.microsoft.com/office/powerpoint/2015/main" val="1"/>
+              </p:ext>
+            </p:extLst>
+          </p:nvPr>
+        </p:nvCxnSpPr>
+        <p:spPr>
+          <a:xfrm>
+            <a:off x="7046569" y="2085703"/>
+            <a:ext cx="4114800" cy="0"/>
+          </a:xfrm>
+          <a:prstGeom prst="line">
+            <a:avLst/>
+          </a:prstGeom>
+          <a:ln w="6350">
+            <a:solidFill>
+              <a:schemeClr val="tx1">
+                <a:lumMod val="50000"/>
+                <a:lumOff val="50000"/>
+                <a:alpha val="90000"/>
+              </a:schemeClr>
+            </a:solidFill>
+          </a:ln>
+        </p:spPr>
+        <p:style>
+          <a:lnRef idx="1">
+            <a:schemeClr val="accent1"/>
+          </a:lnRef>
+          <a:fillRef idx="0">
+            <a:schemeClr val="accent1"/>
+          </a:fillRef>
+          <a:effectRef idx="0">
+            <a:schemeClr val="accent1"/>
+          </a:effectRef>
+          <a:fontRef idx="minor">
+            <a:schemeClr val="tx1"/>
+          </a:fontRef>
+        </p:style>
+      </p:cxnSp>
+      <p:sp>
+        <p:nvSpPr>
+          <p:cNvPr id="53" name="Rectangle 40">
+            <a:extLst>
+              <a:ext uri="{FF2B5EF4-FFF2-40B4-BE49-F238E27FC236}">
+                <a16:creationId xmlns:a16="http://schemas.microsoft.com/office/drawing/2014/main" id="{14BF5C5C-12B0-46A7-8912-9751C89D4779}"/>
+              </a:ext>
+              <a:ext uri="{C183D7F6-B498-43B3-948B-1728B52AA6E4}">
+                <adec:decorative xmlns:adec="http://schemas.microsoft.com/office/drawing/2017/decorative" val="1"/>
+              </a:ext>
+            </a:extLst>
+          </p:cNvPr>
+          <p:cNvSpPr>
+            <a:spLocks noGrp="1" noRot="1" noChangeAspect="1" noMove="1" noResize="1" noEditPoints="1" noAdjustHandles="1" noChangeArrowheads="1" noChangeShapeType="1" noTextEdit="1"/>
+          </p:cNvSpPr>
+          <p:nvPr>
+            <p:extLst>
+              <p:ext uri="{386F3935-93C4-4BCD-93E2-E3B085C9AB24}">
+                <p16:designElem xmlns:p16="http://schemas.microsoft.com/office/powerpoint/2015/main" val="1"/>
+              </p:ext>
+            </p:extLst>
+          </p:nvPr>
+        </p:nvSpPr>
+        <p:spPr>
+          <a:xfrm>
+            <a:off x="321733" y="3879167"/>
+            <a:ext cx="3057906" cy="2130912"/>
+          </a:xfrm>
+          <a:prstGeom prst="rect">
+            <a:avLst/>
+          </a:prstGeom>
+          <a:solidFill>
+            <a:srgbClr val="FFFFFF"/>
+          </a:solidFill>
+          <a:ln w="63500">
+            <a:noFill/>
+            <a:miter lim="800000"/>
+          </a:ln>
+        </p:spPr>
+        <p:style>
+          <a:lnRef idx="2">
+            <a:schemeClr val="accent1">
+              <a:shade val="50000"/>
+            </a:schemeClr>
+          </a:lnRef>
+          <a:fillRef idx="1">
+            <a:schemeClr val="accent1"/>
+          </a:fillRef>
+          <a:effectRef idx="0">
+            <a:schemeClr val="accent1"/>
+          </a:effectRef>
+          <a:fontRef idx="minor">
+            <a:schemeClr val="lt1"/>
+          </a:fontRef>
+        </p:style>
+        <p:txBody>
+          <a:bodyPr rtlCol="0" anchor="ctr"/>
+          <a:lstStyle/>
+          <a:p>
+            <a:pPr algn="ctr"/>
+            <a:endParaRPr lang="en-US"/>
+          </a:p>
+        </p:txBody>
+      </p:sp>
+      <p:pic>
+        <p:nvPicPr>
+          <p:cNvPr id="7" name="Kép 6" descr="What is GitHub.. GitHub is a platform for online… | by Sameer Hussain |  Medium">
+            <a:extLst>
+              <a:ext uri="{FF2B5EF4-FFF2-40B4-BE49-F238E27FC236}">
+                <a16:creationId xmlns:a16="http://schemas.microsoft.com/office/drawing/2014/main" id="{CDCE5BEE-3251-ECFE-2CB9-404589FDBD01}"/>
+              </a:ext>
+            </a:extLst>
+          </p:cNvPr>
+          <p:cNvPicPr>
+            <a:picLocks noChangeAspect="1"/>
+          </p:cNvPicPr>
+          <p:nvPr/>
+        </p:nvPicPr>
+        <p:blipFill>
+          <a:blip r:embed="rId4"/>
+          <a:stretch>
+            <a:fillRect/>
+          </a:stretch>
+        </p:blipFill>
+        <p:spPr>
+          <a:xfrm>
+            <a:off x="455021" y="4427087"/>
+            <a:ext cx="2732321" cy="1012780"/>
+          </a:xfrm>
+          <a:prstGeom prst="rect">
+            <a:avLst/>
+          </a:prstGeom>
+        </p:spPr>
+      </p:pic>
+      <p:sp>
+        <p:nvSpPr>
+          <p:cNvPr id="54" name="Rectangle 42">
+            <a:extLst>
+              <a:ext uri="{FF2B5EF4-FFF2-40B4-BE49-F238E27FC236}">
+                <a16:creationId xmlns:a16="http://schemas.microsoft.com/office/drawing/2014/main" id="{0EF884FC-88CB-4669-9AA4-82CBE2BC033A}"/>
+              </a:ext>
+              <a:ext uri="{C183D7F6-B498-43B3-948B-1728B52AA6E4}">
+                <adec:decorative xmlns:adec="http://schemas.microsoft.com/office/drawing/2017/decorative" val="1"/>
+              </a:ext>
+            </a:extLst>
+          </p:cNvPr>
+          <p:cNvSpPr>
+            <a:spLocks noGrp="1" noRot="1" noChangeAspect="1" noMove="1" noResize="1" noEditPoints="1" noAdjustHandles="1" noChangeArrowheads="1" noChangeShapeType="1" noTextEdit="1"/>
+          </p:cNvSpPr>
+          <p:nvPr>
+            <p:extLst>
+              <p:ext uri="{386F3935-93C4-4BCD-93E2-E3B085C9AB24}">
+                <p16:designElem xmlns:p16="http://schemas.microsoft.com/office/powerpoint/2015/main" val="1"/>
+              </p:ext>
+            </p:extLst>
+          </p:nvPr>
+        </p:nvSpPr>
+        <p:spPr>
+          <a:xfrm>
+            <a:off x="3528588" y="2451014"/>
+            <a:ext cx="2567411" cy="3532765"/>
+          </a:xfrm>
+          <a:prstGeom prst="rect">
+            <a:avLst/>
+          </a:prstGeom>
+          <a:solidFill>
+            <a:srgbClr val="FFFFFF"/>
+          </a:solidFill>
+          <a:ln w="63500">
+            <a:noFill/>
+            <a:miter lim="800000"/>
+          </a:ln>
+        </p:spPr>
+        <p:style>
+          <a:lnRef idx="2">
+            <a:schemeClr val="accent1">
+              <a:shade val="50000"/>
+            </a:schemeClr>
+          </a:lnRef>
+          <a:fillRef idx="1">
+            <a:schemeClr val="accent1"/>
+          </a:fillRef>
+          <a:effectRef idx="0">
+            <a:schemeClr val="accent1"/>
+          </a:effectRef>
+          <a:fontRef idx="minor">
+            <a:schemeClr val="lt1"/>
+          </a:fontRef>
+        </p:style>
+        <p:txBody>
+          <a:bodyPr rtlCol="0" anchor="ctr"/>
+          <a:lstStyle/>
+          <a:p>
+            <a:pPr algn="ctr"/>
+            <a:endParaRPr lang="en-US"/>
+          </a:p>
+        </p:txBody>
+      </p:sp>
+      <p:pic>
+        <p:nvPicPr>
+          <p:cNvPr id="8" name="Kép 7" descr="XAMPP - Wikipedia">
+            <a:extLst>
+              <a:ext uri="{FF2B5EF4-FFF2-40B4-BE49-F238E27FC236}">
+                <a16:creationId xmlns:a16="http://schemas.microsoft.com/office/drawing/2014/main" id="{D7270AE7-68E6-F069-E67C-AA0B51588A77}"/>
+              </a:ext>
+            </a:extLst>
+          </p:cNvPr>
+          <p:cNvPicPr>
+            <a:picLocks noChangeAspect="1"/>
+          </p:cNvPicPr>
+          <p:nvPr/>
+        </p:nvPicPr>
+        <p:blipFill>
+          <a:blip r:embed="rId5"/>
+          <a:stretch>
+            <a:fillRect/>
+          </a:stretch>
+        </p:blipFill>
+        <p:spPr>
+          <a:xfrm>
+            <a:off x="3664752" y="3056085"/>
+            <a:ext cx="2295082" cy="2322622"/>
+          </a:xfrm>
+          <a:prstGeom prst="rect">
+            <a:avLst/>
+          </a:prstGeom>
+        </p:spPr>
+      </p:pic>
       <p:sp>
         <p:nvSpPr>
           <p:cNvPr id="3" name="Tartalom helye 2">
@@ -5496,82 +7147,146 @@
             <p:ph idx="1"/>
           </p:nvPr>
         </p:nvSpPr>
-        <p:spPr/>
-        <p:txBody>
-          <a:bodyPr/>
+        <p:spPr>
+          <a:xfrm>
+            <a:off x="6956868" y="2198914"/>
+            <a:ext cx="4592874" cy="3670180"/>
+          </a:xfrm>
+        </p:spPr>
+        <p:txBody>
+          <a:bodyPr>
+            <a:normAutofit/>
+          </a:bodyPr>
           <a:lstStyle/>
           <a:p>
             <a:r>
-              <a:rPr lang="hu-HU" dirty="0">
+              <a:rPr lang="hu-HU" sz="1800">
                 <a:latin typeface="Times New Roman" panose="02020603050405020304" pitchFamily="18" charset="0"/>
                 <a:cs typeface="Times New Roman" panose="02020603050405020304" pitchFamily="18" charset="0"/>
               </a:rPr>
-              <a:t>Kommunikációs technológiák: Microsoft </a:t>
-            </a:r>
-            <a:r>
-              <a:rPr lang="hu-HU" dirty="0" err="1">
+              <a:t>Kommunikációs technológiák: Microsoft Teams, Discord</a:t>
+            </a:r>
+          </a:p>
+          <a:p>
+            <a:r>
+              <a:rPr lang="hu-HU" sz="1800">
                 <a:latin typeface="Times New Roman" panose="02020603050405020304" pitchFamily="18" charset="0"/>
                 <a:cs typeface="Times New Roman" panose="02020603050405020304" pitchFamily="18" charset="0"/>
               </a:rPr>
-              <a:t>Teams</a:t>
-            </a:r>
-            <a:r>
-              <a:rPr lang="hu-HU" dirty="0">
-                <a:latin typeface="Times New Roman" panose="02020603050405020304" pitchFamily="18" charset="0"/>
-                <a:cs typeface="Times New Roman" panose="02020603050405020304" pitchFamily="18" charset="0"/>
-              </a:rPr>
-              <a:t>, </a:t>
-            </a:r>
-            <a:r>
-              <a:rPr lang="hu-HU" dirty="0" err="1">
-                <a:latin typeface="Times New Roman" panose="02020603050405020304" pitchFamily="18" charset="0"/>
-                <a:cs typeface="Times New Roman" panose="02020603050405020304" pitchFamily="18" charset="0"/>
-              </a:rPr>
-              <a:t>Discord</a:t>
-            </a:r>
-            <a:endParaRPr lang="hu-HU" dirty="0">
-              <a:latin typeface="Times New Roman" panose="02020603050405020304" pitchFamily="18" charset="0"/>
-              <a:cs typeface="Times New Roman" panose="02020603050405020304" pitchFamily="18" charset="0"/>
-            </a:endParaRPr>
-          </a:p>
-          <a:p>
-            <a:r>
-              <a:rPr lang="hu-HU" dirty="0">
-                <a:latin typeface="Times New Roman" panose="02020603050405020304" pitchFamily="18" charset="0"/>
-                <a:cs typeface="Times New Roman" panose="02020603050405020304" pitchFamily="18" charset="0"/>
-              </a:rPr>
-              <a:t>Szoftverek: Visual </a:t>
-            </a:r>
-            <a:r>
-              <a:rPr lang="hu-HU" dirty="0" err="1">
-                <a:latin typeface="Times New Roman" panose="02020603050405020304" pitchFamily="18" charset="0"/>
-                <a:cs typeface="Times New Roman" panose="02020603050405020304" pitchFamily="18" charset="0"/>
-              </a:rPr>
-              <a:t>Studio</a:t>
-            </a:r>
-            <a:r>
-              <a:rPr lang="hu-HU" dirty="0">
-                <a:latin typeface="Times New Roman" panose="02020603050405020304" pitchFamily="18" charset="0"/>
-                <a:cs typeface="Times New Roman" panose="02020603050405020304" pitchFamily="18" charset="0"/>
-              </a:rPr>
-              <a:t> </a:t>
-            </a:r>
-            <a:r>
-              <a:rPr lang="hu-HU" dirty="0" err="1">
-                <a:latin typeface="Times New Roman" panose="02020603050405020304" pitchFamily="18" charset="0"/>
-                <a:cs typeface="Times New Roman" panose="02020603050405020304" pitchFamily="18" charset="0"/>
-              </a:rPr>
-              <a:t>Code</a:t>
-            </a:r>
-            <a:r>
-              <a:rPr lang="hu-HU" dirty="0">
-                <a:latin typeface="Times New Roman" panose="02020603050405020304" pitchFamily="18" charset="0"/>
-                <a:cs typeface="Times New Roman" panose="02020603050405020304" pitchFamily="18" charset="0"/>
-              </a:rPr>
-              <a:t>, XAMPP, GitHub, Postman</a:t>
-            </a:r>
-          </a:p>
-        </p:txBody>
+              <a:t>Szoftverek: Visual Studio Code, XAMPP, GitHub, Postman</a:t>
+            </a:r>
+          </a:p>
+        </p:txBody>
+      </p:sp>
+      <p:sp>
+        <p:nvSpPr>
+          <p:cNvPr id="55" name="Rectangle 44">
+            <a:extLst>
+              <a:ext uri="{FF2B5EF4-FFF2-40B4-BE49-F238E27FC236}">
+                <a16:creationId xmlns:a16="http://schemas.microsoft.com/office/drawing/2014/main" id="{1180F95C-403D-4961-9F97-F226C68788DA}"/>
+              </a:ext>
+              <a:ext uri="{C183D7F6-B498-43B3-948B-1728B52AA6E4}">
+                <adec:decorative xmlns:adec="http://schemas.microsoft.com/office/drawing/2017/decorative" val="1"/>
+              </a:ext>
+            </a:extLst>
+          </p:cNvPr>
+          <p:cNvSpPr>
+            <a:spLocks noGrp="1" noRot="1" noChangeAspect="1" noMove="1" noResize="1" noEditPoints="1" noAdjustHandles="1" noChangeArrowheads="1" noChangeShapeType="1" noTextEdit="1"/>
+          </p:cNvSpPr>
+          <p:nvPr>
+            <p:extLst>
+              <p:ext uri="{386F3935-93C4-4BCD-93E2-E3B085C9AB24}">
+                <p16:designElem xmlns:p16="http://schemas.microsoft.com/office/powerpoint/2015/main" val="1"/>
+              </p:ext>
+            </p:extLst>
+          </p:nvPr>
+        </p:nvSpPr>
+        <p:spPr>
+          <a:xfrm>
+            <a:off x="15" y="6334316"/>
+            <a:ext cx="12191985" cy="66484"/>
+          </a:xfrm>
+          <a:prstGeom prst="rect">
+            <a:avLst/>
+          </a:prstGeom>
+          <a:solidFill>
+            <a:schemeClr val="accent1"/>
+          </a:solidFill>
+          <a:ln>
+            <a:noFill/>
+          </a:ln>
+        </p:spPr>
+        <p:style>
+          <a:lnRef idx="2">
+            <a:schemeClr val="accent1">
+              <a:shade val="50000"/>
+            </a:schemeClr>
+          </a:lnRef>
+          <a:fillRef idx="1">
+            <a:schemeClr val="accent1"/>
+          </a:fillRef>
+          <a:effectRef idx="0">
+            <a:schemeClr val="accent1"/>
+          </a:effectRef>
+          <a:fontRef idx="minor">
+            <a:schemeClr val="lt1"/>
+          </a:fontRef>
+        </p:style>
+      </p:sp>
+      <p:sp>
+        <p:nvSpPr>
+          <p:cNvPr id="47" name="Rectangle 46">
+            <a:extLst>
+              <a:ext uri="{FF2B5EF4-FFF2-40B4-BE49-F238E27FC236}">
+                <a16:creationId xmlns:a16="http://schemas.microsoft.com/office/drawing/2014/main" id="{04DD3E41-33C2-4660-BB4C-BBCF07F65FCD}"/>
+              </a:ext>
+              <a:ext uri="{C183D7F6-B498-43B3-948B-1728B52AA6E4}">
+                <adec:decorative xmlns:adec="http://schemas.microsoft.com/office/drawing/2017/decorative" val="1"/>
+              </a:ext>
+            </a:extLst>
+          </p:cNvPr>
+          <p:cNvSpPr>
+            <a:spLocks noGrp="1" noRot="1" noChangeAspect="1" noMove="1" noResize="1" noEditPoints="1" noAdjustHandles="1" noChangeArrowheads="1" noChangeShapeType="1" noTextEdit="1"/>
+          </p:cNvSpPr>
+          <p:nvPr>
+            <p:extLst>
+              <p:ext uri="{386F3935-93C4-4BCD-93E2-E3B085C9AB24}">
+                <p16:designElem xmlns:p16="http://schemas.microsoft.com/office/powerpoint/2015/main" val="1"/>
+              </p:ext>
+            </p:extLst>
+          </p:nvPr>
+        </p:nvSpPr>
+        <p:spPr>
+          <a:xfrm>
+            <a:off x="1" y="6400800"/>
+            <a:ext cx="12192000" cy="457200"/>
+          </a:xfrm>
+          <a:prstGeom prst="rect">
+            <a:avLst/>
+          </a:prstGeom>
+          <a:solidFill>
+            <a:schemeClr val="accent2"/>
+          </a:solidFill>
+          <a:ln>
+            <a:noFill/>
+          </a:ln>
+        </p:spPr>
+        <p:style>
+          <a:lnRef idx="2">
+            <a:schemeClr val="accent1">
+              <a:shade val="50000"/>
+            </a:schemeClr>
+          </a:lnRef>
+          <a:fillRef idx="1">
+            <a:schemeClr val="accent1"/>
+          </a:fillRef>
+          <a:effectRef idx="0">
+            <a:schemeClr val="accent1"/>
+          </a:effectRef>
+          <a:fontRef idx="minor">
+            <a:schemeClr val="lt1"/>
+          </a:fontRef>
+        </p:style>
       </p:sp>
       <p:sp>
         <p:nvSpPr>
@@ -5589,19 +7304,40 @@
             <p:ph type="sldNum" sz="quarter" idx="12"/>
           </p:nvPr>
         </p:nvSpPr>
-        <p:spPr/>
-        <p:txBody>
-          <a:bodyPr/>
+        <p:spPr>
+          <a:xfrm>
+            <a:off x="9900458" y="6459785"/>
+            <a:ext cx="1312025" cy="365125"/>
+          </a:xfrm>
+        </p:spPr>
+        <p:txBody>
+          <a:bodyPr vert="horz" lIns="91440" tIns="45720" rIns="91440" bIns="45720" rtlCol="0" anchor="ctr">
+            <a:noAutofit/>
+          </a:bodyPr>
           <a:lstStyle/>
           <a:p>
+            <a:pPr>
+              <a:spcAft>
+                <a:spcPts val="600"/>
+              </a:spcAft>
+            </a:pPr>
             <a:fld id="{5444FD88-FB79-4B01-A96D-DDA513F5DE89}" type="slidenum">
-              <a:rPr lang="hu-HU" sz="2000" smtClean="0"/>
+              <a:rPr lang="hu-HU" sz="2000" dirty="0" smtClean="0"/>
+              <a:pPr>
+                <a:spcAft>
+                  <a:spcPts val="600"/>
+                </a:spcAft>
+              </a:pPr>
               <a:t>6</a:t>
             </a:fld>
             <a:r>
-              <a:rPr lang="hu-HU" sz="2000" dirty="0"/>
+              <a:rPr lang="hu-HU" sz="2000"/>
               <a:t>/11</a:t>
             </a:r>
+            <a:endParaRPr lang="hu-HU" sz="2000">
+              <a:ea typeface="Calibri"/>
+              <a:cs typeface="Calibri"/>
+            </a:endParaRPr>
           </a:p>
         </p:txBody>
       </p:sp>
@@ -5621,6 +7357,14 @@
 <file path=ppt/slides/slide7.xml><?xml version="1.0" encoding="utf-8"?>
 <p:sld xmlns:a="http://schemas.openxmlformats.org/drawingml/2006/main" xmlns:r="http://schemas.openxmlformats.org/officeDocument/2006/relationships" xmlns:p="http://schemas.openxmlformats.org/presentationml/2006/main">
   <p:cSld>
+    <p:bg>
+      <p:bgPr>
+        <a:solidFill>
+          <a:schemeClr val="bg1"/>
+        </a:solidFill>
+        <a:effectLst/>
+      </p:bgPr>
+    </p:bg>
     <p:spTree>
       <p:nvGrpSpPr>
         <p:cNvPr id="1" name=""/>
@@ -5635,6 +7379,66 @@
           <a:chExt cx="0" cy="0"/>
         </a:xfrm>
       </p:grpSpPr>
+      <p:sp useBgFill="1">
+        <p:nvSpPr>
+          <p:cNvPr id="8" name="Rectangle 10">
+            <a:extLst>
+              <a:ext uri="{FF2B5EF4-FFF2-40B4-BE49-F238E27FC236}">
+                <a16:creationId xmlns:a16="http://schemas.microsoft.com/office/drawing/2014/main" id="{5CF81D86-BDBA-477C-B7DD-8D359BB9965B}"/>
+              </a:ext>
+              <a:ext uri="{C183D7F6-B498-43B3-948B-1728B52AA6E4}">
+                <adec:decorative xmlns:adec="http://schemas.microsoft.com/office/drawing/2017/decorative" val="1"/>
+              </a:ext>
+            </a:extLst>
+          </p:cNvPr>
+          <p:cNvSpPr>
+            <a:spLocks noGrp="1" noRot="1" noChangeAspect="1" noMove="1" noResize="1" noEditPoints="1" noAdjustHandles="1" noChangeArrowheads="1" noChangeShapeType="1" noTextEdit="1"/>
+          </p:cNvSpPr>
+          <p:nvPr>
+            <p:extLst>
+              <p:ext uri="{386F3935-93C4-4BCD-93E2-E3B085C9AB24}">
+                <p16:designElem xmlns:p16="http://schemas.microsoft.com/office/powerpoint/2015/main" val="1"/>
+              </p:ext>
+            </p:extLst>
+          </p:nvPr>
+        </p:nvSpPr>
+        <p:spPr>
+          <a:xfrm>
+            <a:off x="0" y="0"/>
+            <a:ext cx="12192001" cy="6334316"/>
+          </a:xfrm>
+          <a:prstGeom prst="rect">
+            <a:avLst/>
+          </a:prstGeom>
+          <a:ln>
+            <a:noFill/>
+          </a:ln>
+        </p:spPr>
+        <p:style>
+          <a:lnRef idx="2">
+            <a:schemeClr val="accent1">
+              <a:shade val="50000"/>
+            </a:schemeClr>
+          </a:lnRef>
+          <a:fillRef idx="1">
+            <a:schemeClr val="accent1"/>
+          </a:fillRef>
+          <a:effectRef idx="0">
+            <a:schemeClr val="accent1"/>
+          </a:effectRef>
+          <a:fontRef idx="minor">
+            <a:schemeClr val="lt1"/>
+          </a:fontRef>
+        </p:style>
+        <p:txBody>
+          <a:bodyPr rtlCol="0" anchor="ctr"/>
+          <a:lstStyle/>
+          <a:p>
+            <a:pPr algn="ctr"/>
+            <a:endParaRPr lang="en-US"/>
+          </a:p>
+        </p:txBody>
+      </p:sp>
       <p:sp>
         <p:nvSpPr>
           <p:cNvPr id="2" name="Cím 1">
@@ -5651,9 +7455,16 @@
             <p:ph type="title"/>
           </p:nvPr>
         </p:nvSpPr>
-        <p:spPr/>
-        <p:txBody>
-          <a:bodyPr/>
+        <p:spPr>
+          <a:xfrm>
+            <a:off x="4974771" y="634946"/>
+            <a:ext cx="6574972" cy="1450757"/>
+          </a:xfrm>
+        </p:spPr>
+        <p:txBody>
+          <a:bodyPr>
+            <a:normAutofit/>
+          </a:bodyPr>
           <a:lstStyle/>
           <a:p>
             <a:r>
@@ -5670,6 +7481,93 @@
           </a:p>
         </p:txBody>
       </p:sp>
+      <p:pic>
+        <p:nvPicPr>
+          <p:cNvPr id="5" name="Kép 4" descr="User Accounts on Your Website | The Ultimate Guide">
+            <a:extLst>
+              <a:ext uri="{FF2B5EF4-FFF2-40B4-BE49-F238E27FC236}">
+                <a16:creationId xmlns:a16="http://schemas.microsoft.com/office/drawing/2014/main" id="{66BA4F1E-0E8A-67A8-E0B8-327818A8329E}"/>
+              </a:ext>
+            </a:extLst>
+          </p:cNvPr>
+          <p:cNvPicPr>
+            <a:picLocks noChangeAspect="1"/>
+          </p:cNvPicPr>
+          <p:nvPr/>
+        </p:nvPicPr>
+        <p:blipFill>
+          <a:blip r:embed="rId2"/>
+          <a:srcRect l="48647" r="21237"/>
+          <a:stretch>
+            <a:fillRect/>
+          </a:stretch>
+        </p:blipFill>
+        <p:spPr>
+          <a:xfrm>
+            <a:off x="633999" y="640081"/>
+            <a:ext cx="4001315" cy="5314406"/>
+          </a:xfrm>
+          <a:prstGeom prst="rect">
+            <a:avLst/>
+          </a:prstGeom>
+        </p:spPr>
+      </p:pic>
+      <p:cxnSp>
+        <p:nvCxnSpPr>
+          <p:cNvPr id="9" name="Straight Connector 12">
+            <a:extLst>
+              <a:ext uri="{FF2B5EF4-FFF2-40B4-BE49-F238E27FC236}">
+                <a16:creationId xmlns:a16="http://schemas.microsoft.com/office/drawing/2014/main" id="{C65F3E9C-EF11-4F8F-A621-399C7A3E6401}"/>
+              </a:ext>
+              <a:ext uri="{C183D7F6-B498-43B3-948B-1728B52AA6E4}">
+                <adec:decorative xmlns:adec="http://schemas.microsoft.com/office/drawing/2017/decorative" val="1"/>
+              </a:ext>
+            </a:extLst>
+          </p:cNvPr>
+          <p:cNvCxnSpPr>
+            <a:cxnSpLocks noGrp="1" noRot="1" noChangeAspect="1" noMove="1" noResize="1" noEditPoints="1" noAdjustHandles="1" noChangeArrowheads="1" noChangeShapeType="1"/>
+          </p:cNvCxnSpPr>
+          <p:nvPr>
+            <p:extLst>
+              <p:ext uri="{386F3935-93C4-4BCD-93E2-E3B085C9AB24}">
+                <p16:designElem xmlns:p16="http://schemas.microsoft.com/office/powerpoint/2015/main" val="1"/>
+              </p:ext>
+            </p:extLst>
+          </p:nvPr>
+        </p:nvCxnSpPr>
+        <p:spPr>
+          <a:xfrm>
+            <a:off x="4974770" y="2086188"/>
+            <a:ext cx="6089768" cy="0"/>
+          </a:xfrm>
+          <a:prstGeom prst="line">
+            <a:avLst/>
+          </a:prstGeom>
+          <a:ln w="6350">
+            <a:solidFill>
+              <a:schemeClr val="tx1">
+                <a:lumMod val="50000"/>
+                <a:lumOff val="50000"/>
+                <a:alpha val="90000"/>
+              </a:schemeClr>
+            </a:solidFill>
+          </a:ln>
+        </p:spPr>
+        <p:style>
+          <a:lnRef idx="1">
+            <a:schemeClr val="accent1"/>
+          </a:lnRef>
+          <a:fillRef idx="0">
+            <a:schemeClr val="accent1"/>
+          </a:fillRef>
+          <a:effectRef idx="0">
+            <a:schemeClr val="accent1"/>
+          </a:effectRef>
+          <a:fontRef idx="minor">
+            <a:schemeClr val="tx1"/>
+          </a:fontRef>
+        </p:style>
+      </p:cxnSp>
       <p:sp>
         <p:nvSpPr>
           <p:cNvPr id="3" name="Tartalom helye 2">
@@ -5686,9 +7584,16 @@
             <p:ph idx="1"/>
           </p:nvPr>
         </p:nvSpPr>
-        <p:spPr/>
-        <p:txBody>
-          <a:bodyPr/>
+        <p:spPr>
+          <a:xfrm>
+            <a:off x="4974769" y="2198914"/>
+            <a:ext cx="6574973" cy="3670180"/>
+          </a:xfrm>
+        </p:spPr>
+        <p:txBody>
+          <a:bodyPr>
+            <a:normAutofit/>
+          </a:bodyPr>
           <a:lstStyle/>
           <a:p>
             <a:pPr lvl="1"/>
@@ -5795,6 +7700,116 @@
             </a:r>
           </a:p>
         </p:txBody>
+      </p:sp>
+      <p:sp>
+        <p:nvSpPr>
+          <p:cNvPr id="10" name="Rectangle 14">
+            <a:extLst>
+              <a:ext uri="{FF2B5EF4-FFF2-40B4-BE49-F238E27FC236}">
+                <a16:creationId xmlns:a16="http://schemas.microsoft.com/office/drawing/2014/main" id="{88AA064E-5F6E-4024-BC28-EDDC3DFC70E1}"/>
+              </a:ext>
+              <a:ext uri="{C183D7F6-B498-43B3-948B-1728B52AA6E4}">
+                <adec:decorative xmlns:adec="http://schemas.microsoft.com/office/drawing/2017/decorative" val="1"/>
+              </a:ext>
+            </a:extLst>
+          </p:cNvPr>
+          <p:cNvSpPr>
+            <a:spLocks noGrp="1" noRot="1" noChangeAspect="1" noMove="1" noResize="1" noEditPoints="1" noAdjustHandles="1" noChangeArrowheads="1" noChangeShapeType="1" noTextEdit="1"/>
+          </p:cNvSpPr>
+          <p:nvPr>
+            <p:extLst>
+              <p:ext uri="{386F3935-93C4-4BCD-93E2-E3B085C9AB24}">
+                <p16:designElem xmlns:p16="http://schemas.microsoft.com/office/powerpoint/2015/main" val="1"/>
+              </p:ext>
+            </p:extLst>
+          </p:nvPr>
+        </p:nvSpPr>
+        <p:spPr>
+          <a:xfrm>
+            <a:off x="15" y="6334316"/>
+            <a:ext cx="12191985" cy="66484"/>
+          </a:xfrm>
+          <a:prstGeom prst="rect">
+            <a:avLst/>
+          </a:prstGeom>
+          <a:solidFill>
+            <a:schemeClr val="accent1"/>
+          </a:solidFill>
+          <a:ln>
+            <a:noFill/>
+          </a:ln>
+        </p:spPr>
+        <p:style>
+          <a:lnRef idx="2">
+            <a:schemeClr val="accent1">
+              <a:shade val="50000"/>
+            </a:schemeClr>
+          </a:lnRef>
+          <a:fillRef idx="1">
+            <a:schemeClr val="accent1"/>
+          </a:fillRef>
+          <a:effectRef idx="0">
+            <a:schemeClr val="accent1"/>
+          </a:effectRef>
+          <a:fontRef idx="minor">
+            <a:schemeClr val="lt1"/>
+          </a:fontRef>
+        </p:style>
+      </p:sp>
+      <p:sp>
+        <p:nvSpPr>
+          <p:cNvPr id="12" name="Rectangle 16">
+            <a:extLst>
+              <a:ext uri="{FF2B5EF4-FFF2-40B4-BE49-F238E27FC236}">
+                <a16:creationId xmlns:a16="http://schemas.microsoft.com/office/drawing/2014/main" id="{03B29638-4838-4B9B-B9DB-96E542BAF3E6}"/>
+              </a:ext>
+              <a:ext uri="{C183D7F6-B498-43B3-948B-1728B52AA6E4}">
+                <adec:decorative xmlns:adec="http://schemas.microsoft.com/office/drawing/2017/decorative" val="1"/>
+              </a:ext>
+            </a:extLst>
+          </p:cNvPr>
+          <p:cNvSpPr>
+            <a:spLocks noGrp="1" noRot="1" noChangeAspect="1" noMove="1" noResize="1" noEditPoints="1" noAdjustHandles="1" noChangeArrowheads="1" noChangeShapeType="1" noTextEdit="1"/>
+          </p:cNvSpPr>
+          <p:nvPr>
+            <p:extLst>
+              <p:ext uri="{386F3935-93C4-4BCD-93E2-E3B085C9AB24}">
+                <p16:designElem xmlns:p16="http://schemas.microsoft.com/office/powerpoint/2015/main" val="1"/>
+              </p:ext>
+            </p:extLst>
+          </p:nvPr>
+        </p:nvSpPr>
+        <p:spPr>
+          <a:xfrm>
+            <a:off x="1" y="6400800"/>
+            <a:ext cx="12192000" cy="457200"/>
+          </a:xfrm>
+          <a:prstGeom prst="rect">
+            <a:avLst/>
+          </a:prstGeom>
+          <a:solidFill>
+            <a:schemeClr val="accent2"/>
+          </a:solidFill>
+          <a:ln>
+            <a:noFill/>
+          </a:ln>
+        </p:spPr>
+        <p:style>
+          <a:lnRef idx="2">
+            <a:schemeClr val="accent1">
+              <a:shade val="50000"/>
+            </a:schemeClr>
+          </a:lnRef>
+          <a:fillRef idx="1">
+            <a:schemeClr val="accent1"/>
+          </a:fillRef>
+          <a:effectRef idx="0">
+            <a:schemeClr val="accent1"/>
+          </a:effectRef>
+          <a:fontRef idx="minor">
+            <a:schemeClr val="lt1"/>
+          </a:fontRef>
+        </p:style>
       </p:sp>
       <p:sp>
         <p:nvSpPr>
@@ -5812,15 +7827,31 @@
             <p:ph type="sldNum" sz="quarter" idx="12"/>
           </p:nvPr>
         </p:nvSpPr>
-        <p:spPr/>
-        <p:txBody>
-          <a:bodyPr/>
+        <p:spPr>
+          <a:xfrm>
+            <a:off x="9900458" y="6459785"/>
+            <a:ext cx="1312025" cy="365125"/>
+          </a:xfrm>
+        </p:spPr>
+        <p:txBody>
+          <a:bodyPr>
+            <a:noAutofit/>
+          </a:bodyPr>
           <a:lstStyle/>
           <a:p>
-            <a:r>
-              <a:rPr lang="hu-HU" sz="2000" dirty="0"/>
+            <a:pPr>
+              <a:spcAft>
+                <a:spcPts val="600"/>
+              </a:spcAft>
+            </a:pPr>
+            <a:r>
+              <a:rPr lang="hu-HU" sz="2000"/>
               <a:t>7/11</a:t>
             </a:r>
+            <a:endParaRPr lang="hu-HU" sz="2000">
+              <a:ea typeface="Calibri"/>
+              <a:cs typeface="Calibri"/>
+            </a:endParaRPr>
           </a:p>
         </p:txBody>
       </p:sp>
@@ -5840,6 +7871,14 @@
 <file path=ppt/slides/slide8.xml><?xml version="1.0" encoding="utf-8"?>
 <p:sld xmlns:a="http://schemas.openxmlformats.org/drawingml/2006/main" xmlns:r="http://schemas.openxmlformats.org/officeDocument/2006/relationships" xmlns:p="http://schemas.openxmlformats.org/presentationml/2006/main">
   <p:cSld>
+    <p:bg>
+      <p:bgPr>
+        <a:solidFill>
+          <a:schemeClr val="bg1"/>
+        </a:solidFill>
+        <a:effectLst/>
+      </p:bgPr>
+    </p:bg>
     <p:spTree>
       <p:nvGrpSpPr>
         <p:cNvPr id="1" name=""/>
@@ -5870,9 +7909,16 @@
             <p:ph type="title"/>
           </p:nvPr>
         </p:nvSpPr>
-        <p:spPr/>
-        <p:txBody>
-          <a:bodyPr/>
+        <p:spPr>
+          <a:xfrm>
+            <a:off x="1097280" y="286603"/>
+            <a:ext cx="10058400" cy="1450757"/>
+          </a:xfrm>
+        </p:spPr>
+        <p:txBody>
+          <a:bodyPr>
+            <a:normAutofit/>
+          </a:bodyPr>
           <a:lstStyle/>
           <a:p>
             <a:r>
@@ -5889,6 +7935,36 @@
           </a:p>
         </p:txBody>
       </p:sp>
+      <p:pic>
+        <p:nvPicPr>
+          <p:cNvPr id="4" name="Kép 3" descr="Database Server Icon SVG Vector &amp; PNG Free Download | UXWing">
+            <a:extLst>
+              <a:ext uri="{FF2B5EF4-FFF2-40B4-BE49-F238E27FC236}">
+                <a16:creationId xmlns:a16="http://schemas.microsoft.com/office/drawing/2014/main" id="{8CC2CC8B-915F-A70A-2683-51484001FBCF}"/>
+              </a:ext>
+            </a:extLst>
+          </p:cNvPr>
+          <p:cNvPicPr>
+            <a:picLocks noChangeAspect="1"/>
+          </p:cNvPicPr>
+          <p:nvPr/>
+        </p:nvPicPr>
+        <p:blipFill>
+          <a:blip r:embed="rId2"/>
+          <a:stretch>
+            <a:fillRect/>
+          </a:stretch>
+        </p:blipFill>
+        <p:spPr>
+          <a:xfrm>
+            <a:off x="1076432" y="2097417"/>
+            <a:ext cx="3094997" cy="3108813"/>
+          </a:xfrm>
+          <a:prstGeom prst="rect">
+            <a:avLst/>
+          </a:prstGeom>
+        </p:spPr>
+      </p:pic>
       <p:sp>
         <p:nvSpPr>
           <p:cNvPr id="3" name="Tartalom helye 2">
@@ -5905,87 +7981,68 @@
             <p:ph idx="1"/>
           </p:nvPr>
         </p:nvSpPr>
-        <p:spPr/>
-        <p:txBody>
-          <a:bodyPr/>
+        <p:spPr>
+          <a:xfrm>
+            <a:off x="4639733" y="1845734"/>
+            <a:ext cx="6515947" cy="4023360"/>
+          </a:xfrm>
+        </p:spPr>
+        <p:txBody>
+          <a:bodyPr vert="horz" lIns="0" tIns="45720" rIns="0" bIns="45720" rtlCol="0">
+            <a:normAutofit/>
+          </a:bodyPr>
           <a:lstStyle/>
           <a:p>
-            <a:pPr>
-              <a:buFont typeface="Courier New" panose="02070309020205020404" pitchFamily="49" charset="0"/>
+            <a:pPr marL="383540" lvl="1">
+              <a:buFont typeface="Courier New" panose="020F0502020204030204" pitchFamily="34" charset="0"/>
               <a:buChar char="o"/>
             </a:pPr>
             <a:r>
-              <a:rPr lang="hu-HU" dirty="0">
-                <a:latin typeface="Times New Roman" panose="02020603050405020304" pitchFamily="18" charset="0"/>
-                <a:cs typeface="Times New Roman" panose="02020603050405020304" pitchFamily="18" charset="0"/>
+              <a:rPr lang="hu-HU">
+                <a:latin typeface="Times New Roman"/>
+                <a:cs typeface="Times New Roman"/>
               </a:rPr>
-              <a:t>Eltárolja az összes releváns adatokat és </a:t>
-            </a:r>
-            <a:r>
-              <a:rPr lang="hu-HU" dirty="0" err="1">
-                <a:latin typeface="Times New Roman" panose="02020603050405020304" pitchFamily="18" charset="0"/>
-                <a:cs typeface="Times New Roman" panose="02020603050405020304" pitchFamily="18" charset="0"/>
-              </a:rPr>
-              <a:t>validálja</a:t>
-            </a:r>
-            <a:r>
-              <a:rPr lang="hu-HU" dirty="0">
-                <a:latin typeface="Times New Roman" panose="02020603050405020304" pitchFamily="18" charset="0"/>
-                <a:cs typeface="Times New Roman" panose="02020603050405020304" pitchFamily="18" charset="0"/>
-              </a:rPr>
-              <a:t> azokat</a:t>
-            </a:r>
-          </a:p>
-          <a:p>
-            <a:pPr>
-              <a:buFont typeface="Courier New" panose="02070309020205020404" pitchFamily="49" charset="0"/>
+              <a:t>Adatok tárolása és validálása</a:t>
+            </a:r>
+          </a:p>
+          <a:p>
+            <a:pPr marL="383540" lvl="1">
+              <a:buFont typeface="Courier New" panose="020F0502020204030204" pitchFamily="34" charset="0"/>
               <a:buChar char="o"/>
             </a:pPr>
             <a:r>
-              <a:rPr lang="hu-HU" dirty="0">
-                <a:latin typeface="Times New Roman" panose="02020603050405020304" pitchFamily="18" charset="0"/>
-                <a:cs typeface="Times New Roman" panose="02020603050405020304" pitchFamily="18" charset="0"/>
+              <a:rPr lang="hu-HU">
+                <a:latin typeface="Times New Roman"/>
+                <a:cs typeface="Times New Roman"/>
               </a:rPr>
-              <a:t>Kezeli a kölcsönzés dátumait és frissíti ez alapján az adatbázist</a:t>
-            </a:r>
-          </a:p>
-          <a:p>
-            <a:pPr>
-              <a:buFont typeface="Courier New" panose="02070309020205020404" pitchFamily="49" charset="0"/>
+              <a:t>Kölcsönzés dátum kezelése</a:t>
+            </a:r>
+          </a:p>
+          <a:p>
+            <a:pPr marL="383540" lvl="1">
+              <a:buFont typeface="Courier New" panose="020F0502020204030204" pitchFamily="34" charset="0"/>
               <a:buChar char="o"/>
             </a:pPr>
             <a:r>
-              <a:rPr lang="hu-HU" dirty="0">
-                <a:latin typeface="Times New Roman" panose="02020603050405020304" pitchFamily="18" charset="0"/>
-                <a:cs typeface="Times New Roman" panose="02020603050405020304" pitchFamily="18" charset="0"/>
+              <a:rPr lang="hu-HU">
+                <a:latin typeface="Times New Roman"/>
+                <a:cs typeface="Times New Roman"/>
               </a:rPr>
-              <a:t>Kezeli a könyvtár leltárját a  kölcsönzéseket figyelembe véve</a:t>
-            </a:r>
-          </a:p>
-          <a:p>
-            <a:pPr>
-              <a:buFont typeface="Courier New" panose="02070309020205020404" pitchFamily="49" charset="0"/>
+              <a:t>Könyvtári leltár kezelése kölcsönzéseket figyelembe véve</a:t>
+            </a:r>
+          </a:p>
+          <a:p>
+            <a:pPr marL="383540" lvl="1">
+              <a:buFont typeface="Courier New" panose="020F0502020204030204" pitchFamily="34" charset="0"/>
               <a:buChar char="o"/>
             </a:pPr>
             <a:r>
-              <a:rPr lang="hu-HU" dirty="0">
-                <a:latin typeface="Times New Roman" panose="02020603050405020304" pitchFamily="18" charset="0"/>
-                <a:cs typeface="Times New Roman" panose="02020603050405020304" pitchFamily="18" charset="0"/>
+              <a:rPr lang="hu-HU">
+                <a:latin typeface="Times New Roman"/>
+                <a:cs typeface="Times New Roman"/>
               </a:rPr>
-              <a:t>Lehetővé teszi a dinamikus böngészést több paraméter alapján</a:t>
-            </a:r>
-          </a:p>
-          <a:p>
-            <a:endParaRPr lang="hu-HU" dirty="0"/>
-          </a:p>
-          <a:p>
-            <a:endParaRPr lang="hu-HU" dirty="0"/>
-          </a:p>
-          <a:p>
-            <a:endParaRPr lang="hu-HU" dirty="0">
-              <a:latin typeface="Times New Roman" panose="02020603050405020304" pitchFamily="18" charset="0"/>
-              <a:cs typeface="Times New Roman" panose="02020603050405020304" pitchFamily="18" charset="0"/>
-            </a:endParaRPr>
+              <a:t>Dinamikus böngészés több paraméter alapján</a:t>
+            </a:r>
           </a:p>
         </p:txBody>
       </p:sp>
@@ -6005,19 +8062,40 @@
             <p:ph type="sldNum" sz="quarter" idx="12"/>
           </p:nvPr>
         </p:nvSpPr>
-        <p:spPr/>
-        <p:txBody>
-          <a:bodyPr/>
+        <p:spPr>
+          <a:xfrm>
+            <a:off x="9900458" y="6459785"/>
+            <a:ext cx="1312025" cy="365125"/>
+          </a:xfrm>
+        </p:spPr>
+        <p:txBody>
+          <a:bodyPr vert="horz" lIns="91440" tIns="45720" rIns="91440" bIns="45720" rtlCol="0" anchor="ctr">
+            <a:noAutofit/>
+          </a:bodyPr>
           <a:lstStyle/>
           <a:p>
+            <a:pPr>
+              <a:spcAft>
+                <a:spcPts val="600"/>
+              </a:spcAft>
+            </a:pPr>
             <a:fld id="{5444FD88-FB79-4B01-A96D-DDA513F5DE89}" type="slidenum">
-              <a:rPr lang="hu-HU" sz="2000" smtClean="0"/>
+              <a:rPr lang="hu-HU" sz="2000" dirty="0" smtClean="0"/>
+              <a:pPr>
+                <a:spcAft>
+                  <a:spcPts val="600"/>
+                </a:spcAft>
+              </a:pPr>
               <a:t>8</a:t>
             </a:fld>
             <a:r>
-              <a:rPr lang="hu-HU" sz="2000" dirty="0"/>
+              <a:rPr lang="hu-HU" sz="2000"/>
               <a:t>/11</a:t>
             </a:r>
+            <a:endParaRPr lang="hu-HU" sz="2000">
+              <a:ea typeface="Calibri"/>
+              <a:cs typeface="Calibri"/>
+            </a:endParaRPr>
           </a:p>
         </p:txBody>
       </p:sp>
@@ -6073,12 +8151,16 @@
           <a:lstStyle/>
           <a:p>
             <a:r>
-              <a:rPr lang="hu-HU" dirty="0">
+              <a:rPr lang="hu-HU">
                 <a:latin typeface="Times New Roman" panose="02020603050405020304" pitchFamily="18" charset="0"/>
                 <a:cs typeface="Times New Roman" panose="02020603050405020304" pitchFamily="18" charset="0"/>
               </a:rPr>
               <a:t>DEMO</a:t>
             </a:r>
+            <a:endParaRPr lang="hu-HU" dirty="0">
+              <a:latin typeface="Times New Roman" panose="02020603050405020304" pitchFamily="18" charset="0"/>
+              <a:cs typeface="Times New Roman" panose="02020603050405020304" pitchFamily="18" charset="0"/>
+            </a:endParaRPr>
           </a:p>
         </p:txBody>
       </p:sp>
@@ -6100,89 +8182,125 @@
         </p:nvSpPr>
         <p:spPr/>
         <p:txBody>
-          <a:bodyPr/>
+          <a:bodyPr vert="horz" lIns="0" tIns="45720" rIns="0" bIns="45720" rtlCol="0" anchor="t">
+            <a:normAutofit/>
+          </a:bodyPr>
           <a:lstStyle/>
           <a:p>
-            <a:pPr>
-              <a:buFont typeface="Courier New" panose="02070309020205020404" pitchFamily="49" charset="0"/>
+            <a:r>
+              <a:rPr lang="hu-HU">
+                <a:latin typeface="Times New Roman"/>
+                <a:cs typeface="Times New Roman"/>
+              </a:rPr>
+              <a:t>Bemutatot funkciók:</a:t>
+            </a:r>
+            <a:endParaRPr lang="hu-HU" dirty="0">
+              <a:latin typeface="Times New Roman" panose="02020603050405020304" pitchFamily="18" charset="0"/>
+              <a:cs typeface="Times New Roman" panose="02020603050405020304" pitchFamily="18" charset="0"/>
+            </a:endParaRPr>
+          </a:p>
+          <a:p>
+            <a:pPr marL="383540" lvl="1">
+              <a:buFont typeface="Courier New" panose="020F0502020204030204" pitchFamily="34" charset="0"/>
               <a:buChar char="o"/>
             </a:pPr>
             <a:r>
-              <a:rPr lang="hu-HU" dirty="0">
-                <a:latin typeface="Times New Roman" panose="02020603050405020304" pitchFamily="18" charset="0"/>
-                <a:cs typeface="Times New Roman" panose="02020603050405020304" pitchFamily="18" charset="0"/>
+              <a:rPr lang="hu-HU">
+                <a:latin typeface="Times New Roman"/>
+                <a:cs typeface="Times New Roman"/>
               </a:rPr>
-              <a:t>bejelentkezés</a:t>
-            </a:r>
-          </a:p>
-          <a:p>
-            <a:pPr>
-              <a:buFont typeface="Courier New" panose="02070309020205020404" pitchFamily="49" charset="0"/>
+              <a:t>Bejelentkezés</a:t>
+            </a:r>
+            <a:endParaRPr lang="hu-HU" dirty="0">
+              <a:latin typeface="Times New Roman" panose="02020603050405020304" pitchFamily="18" charset="0"/>
+              <a:cs typeface="Times New Roman" panose="02020603050405020304" pitchFamily="18" charset="0"/>
+            </a:endParaRPr>
+          </a:p>
+          <a:p>
+            <a:pPr marL="383540" lvl="1">
+              <a:buFont typeface="Courier New" panose="020F0502020204030204" pitchFamily="34" charset="0"/>
               <a:buChar char="o"/>
             </a:pPr>
             <a:r>
-              <a:rPr lang="hu-HU" dirty="0">
-                <a:latin typeface="Times New Roman" panose="02020603050405020304" pitchFamily="18" charset="0"/>
-                <a:cs typeface="Times New Roman" panose="02020603050405020304" pitchFamily="18" charset="0"/>
+              <a:rPr lang="hu-HU">
+                <a:latin typeface="Times New Roman"/>
+                <a:cs typeface="Times New Roman"/>
               </a:rPr>
-              <a:t>keresés és böngészés</a:t>
-            </a:r>
-          </a:p>
-          <a:p>
-            <a:pPr>
-              <a:buFont typeface="Courier New" panose="02070309020205020404" pitchFamily="49" charset="0"/>
+              <a:t>Keresés-böngészés</a:t>
+            </a:r>
+            <a:endParaRPr lang="hu-HU" dirty="0">
+              <a:latin typeface="Times New Roman" panose="02020603050405020304" pitchFamily="18" charset="0"/>
+              <a:cs typeface="Times New Roman" panose="02020603050405020304" pitchFamily="18" charset="0"/>
+            </a:endParaRPr>
+          </a:p>
+          <a:p>
+            <a:pPr marL="383540" lvl="1">
+              <a:buFont typeface="Courier New" panose="020F0502020204030204" pitchFamily="34" charset="0"/>
               <a:buChar char="o"/>
             </a:pPr>
             <a:r>
-              <a:rPr lang="hu-HU" dirty="0">
-                <a:latin typeface="Times New Roman" panose="02020603050405020304" pitchFamily="18" charset="0"/>
-                <a:cs typeface="Times New Roman" panose="02020603050405020304" pitchFamily="18" charset="0"/>
+              <a:rPr lang="hu-HU">
+                <a:latin typeface="Times New Roman"/>
+                <a:cs typeface="Times New Roman"/>
               </a:rPr>
-              <a:t>vélemény írás</a:t>
-            </a:r>
-          </a:p>
-          <a:p>
-            <a:pPr>
-              <a:buFont typeface="Courier New" panose="02070309020205020404" pitchFamily="49" charset="0"/>
+              <a:t>Vélemény írás</a:t>
+            </a:r>
+          </a:p>
+          <a:p>
+            <a:pPr marL="383540" lvl="1">
+              <a:buFont typeface="Courier New" panose="020F0502020204030204" pitchFamily="34" charset="0"/>
               <a:buChar char="o"/>
             </a:pPr>
             <a:r>
-              <a:rPr lang="hu-HU" dirty="0">
-                <a:latin typeface="Times New Roman" panose="02020603050405020304" pitchFamily="18" charset="0"/>
-                <a:cs typeface="Times New Roman" panose="02020603050405020304" pitchFamily="18" charset="0"/>
+              <a:rPr lang="hu-HU">
+                <a:latin typeface="Times New Roman"/>
+                <a:cs typeface="Times New Roman"/>
               </a:rPr>
-              <a:t>kölcsönzés</a:t>
-            </a:r>
-          </a:p>
-          <a:p>
-            <a:pPr>
-              <a:buFont typeface="Courier New" panose="02070309020205020404" pitchFamily="49" charset="0"/>
+              <a:t>Kölcsönzés</a:t>
+            </a:r>
+            <a:endParaRPr lang="hu-HU" dirty="0">
+              <a:latin typeface="Times New Roman" panose="02020603050405020304" pitchFamily="18" charset="0"/>
+              <a:cs typeface="Times New Roman" panose="02020603050405020304" pitchFamily="18" charset="0"/>
+            </a:endParaRPr>
+          </a:p>
+          <a:p>
+            <a:pPr marL="383540" lvl="1">
+              <a:buFont typeface="Courier New" panose="020F0502020204030204" pitchFamily="34" charset="0"/>
               <a:buChar char="o"/>
             </a:pPr>
             <a:r>
-              <a:rPr lang="hu-HU" dirty="0">
-                <a:latin typeface="Times New Roman" panose="02020603050405020304" pitchFamily="18" charset="0"/>
-                <a:cs typeface="Times New Roman" panose="02020603050405020304" pitchFamily="18" charset="0"/>
+              <a:rPr lang="hu-HU">
+                <a:latin typeface="Times New Roman"/>
+                <a:cs typeface="Times New Roman"/>
               </a:rPr>
-              <a:t>vélemény bejelentés</a:t>
-            </a:r>
-          </a:p>
-          <a:p>
-            <a:pPr>
-              <a:buFont typeface="Courier New" panose="02070309020205020404" pitchFamily="49" charset="0"/>
+              <a:t>Vélemény bejelentés</a:t>
+            </a:r>
+            <a:endParaRPr lang="hu-HU" dirty="0">
+              <a:latin typeface="Times New Roman" panose="02020603050405020304" pitchFamily="18" charset="0"/>
+              <a:cs typeface="Times New Roman" panose="02020603050405020304" pitchFamily="18" charset="0"/>
+            </a:endParaRPr>
+          </a:p>
+          <a:p>
+            <a:pPr marL="383540" lvl="1">
+              <a:buFont typeface="Courier New" panose="020F0502020204030204" pitchFamily="34" charset="0"/>
               <a:buChar char="o"/>
             </a:pPr>
             <a:r>
-              <a:rPr lang="hu-HU" dirty="0">
-                <a:latin typeface="Times New Roman" panose="02020603050405020304" pitchFamily="18" charset="0"/>
-                <a:cs typeface="Times New Roman" panose="02020603050405020304" pitchFamily="18" charset="0"/>
+              <a:rPr lang="hu-HU">
+                <a:latin typeface="Times New Roman"/>
+                <a:cs typeface="Times New Roman"/>
               </a:rPr>
-              <a:t>kölcsönzés és vélemény kezelés</a:t>
-            </a:r>
-          </a:p>
-          <a:p>
-            <a:pPr marL="0" indent="0">
-              <a:buNone/>
+              <a:t>Kölcsönzés és vélemény kezelés</a:t>
+            </a:r>
+            <a:endParaRPr lang="hu-HU" dirty="0">
+              <a:latin typeface="Times New Roman" panose="02020603050405020304" pitchFamily="18" charset="0"/>
+              <a:cs typeface="Times New Roman" panose="02020603050405020304" pitchFamily="18" charset="0"/>
+            </a:endParaRPr>
+          </a:p>
+          <a:p>
+            <a:pPr marL="383540" lvl="1">
+              <a:buFont typeface="Courier New" panose="020F0502020204030204" pitchFamily="34" charset="0"/>
+              <a:buChar char="o"/>
             </a:pPr>
             <a:endParaRPr lang="hu-HU" dirty="0">
               <a:latin typeface="Times New Roman" panose="02020603050405020304" pitchFamily="18" charset="0"/>
